--- a/tools/presentations/output/ICDEV_Executive_Deck.pptx
+++ b/tools/presentations/output/ICDEV_Executive_Deck.pptx
@@ -22377,7 +22377,7 @@
                   <a:srgbClr val="C8A951"/>
                 </a:solidFill>
               </a:rPr>
-              <a:t>Common Use Cases</a:t>
+              <a:t>Use Cases (13)</a:t>
             </a:r>
           </a:p>
         </p:txBody>
@@ -22391,170 +22391,306 @@
         <p:spPr>
           <a:xfrm>
             <a:off x="612648" y="2423160"/>
-            <a:ext cx="2249424" cy="347472"/>
-          </a:xfrm>
-          <a:prstGeom prst="rect">
-            <a:avLst/>
-          </a:prstGeom>
-          <a:noFill/>
-        </p:spPr>
-        <p:txBody>
-          <a:bodyPr wrap="square">
-            <a:spAutoFit/>
-          </a:bodyPr>
-          <a:lstStyle/>
-          <a:p>
-            <a:pPr algn="l"/>
-            <a:r>
-              <a:rPr sz="1000" b="0" i="0">
+            <a:ext cx="2249424" cy="310896"/>
+          </a:xfrm>
+          <a:prstGeom prst="rect">
+            <a:avLst/>
+          </a:prstGeom>
+          <a:noFill/>
+        </p:spPr>
+        <p:txBody>
+          <a:bodyPr wrap="square">
+            <a:spAutoFit/>
+          </a:bodyPr>
+          <a:lstStyle/>
+          <a:p>
+            <a:pPr algn="l"/>
+            <a:r>
+              <a:rPr sz="900" b="0" i="0">
+                <a:solidFill>
+                  <a:srgbClr val="C8A951"/>
+                </a:solidFill>
+              </a:rPr>
+              <a:t>+ New Chat</a:t>
+            </a:r>
+          </a:p>
+        </p:txBody>
+      </p:sp>
+      <p:sp>
+        <p:nvSpPr>
+          <p:cNvPr id="12" name="TextBox 11"/>
+          <p:cNvSpPr txBox="1"/>
+          <p:nvPr/>
+        </p:nvSpPr>
+        <p:spPr>
+          <a:xfrm>
+            <a:off x="612648" y="2752344"/>
+            <a:ext cx="2249424" cy="310896"/>
+          </a:xfrm>
+          <a:prstGeom prst="rect">
+            <a:avLst/>
+          </a:prstGeom>
+          <a:noFill/>
+        </p:spPr>
+        <p:txBody>
+          <a:bodyPr wrap="square">
+            <a:spAutoFit/>
+          </a:bodyPr>
+          <a:lstStyle/>
+          <a:p>
+            <a:pPr algn="l"/>
+            <a:r>
+              <a:rPr sz="900" b="0" i="0">
+                <a:solidFill>
+                  <a:srgbClr val="C8A951"/>
+                </a:solidFill>
+              </a:rPr>
+              <a:t>▸ General Modernization</a:t>
+            </a:r>
+          </a:p>
+        </p:txBody>
+      </p:sp>
+      <p:sp>
+        <p:nvSpPr>
+          <p:cNvPr id="13" name="TextBox 12"/>
+          <p:cNvSpPr txBox="1"/>
+          <p:nvPr/>
+        </p:nvSpPr>
+        <p:spPr>
+          <a:xfrm>
+            <a:off x="612648" y="3081528"/>
+            <a:ext cx="2249424" cy="310896"/>
+          </a:xfrm>
+          <a:prstGeom prst="rect">
+            <a:avLst/>
+          </a:prstGeom>
+          <a:noFill/>
+        </p:spPr>
+        <p:txBody>
+          <a:bodyPr wrap="square">
+            <a:spAutoFit/>
+          </a:bodyPr>
+          <a:lstStyle/>
+          <a:p>
+            <a:pPr algn="l"/>
+            <a:r>
+              <a:rPr sz="900" b="0" i="0">
                 <a:solidFill>
                   <a:srgbClr val="E0E6F0"/>
                 </a:solidFill>
               </a:rPr>
-              <a:t>+ New Chat</a:t>
-            </a:r>
-          </a:p>
-        </p:txBody>
-      </p:sp>
-      <p:sp>
-        <p:nvSpPr>
-          <p:cNvPr id="12" name="TextBox 11"/>
-          <p:cNvSpPr txBox="1"/>
-          <p:nvPr/>
-        </p:nvSpPr>
-        <p:spPr>
-          <a:xfrm>
-            <a:off x="612648" y="2807208"/>
-            <a:ext cx="2249424" cy="347472"/>
-          </a:xfrm>
-          <a:prstGeom prst="rect">
-            <a:avLst/>
-          </a:prstGeom>
-          <a:noFill/>
-        </p:spPr>
-        <p:txBody>
-          <a:bodyPr wrap="square">
-            <a:spAutoFit/>
-          </a:bodyPr>
-          <a:lstStyle/>
-          <a:p>
-            <a:pPr algn="l"/>
-            <a:r>
-              <a:rPr sz="1000" b="0" i="0">
-                <a:solidFill>
-                  <a:srgbClr val="C8A951"/>
-                </a:solidFill>
-              </a:rPr>
-              <a:t>▸ General Modernization</a:t>
-            </a:r>
-          </a:p>
-        </p:txBody>
-      </p:sp>
-      <p:sp>
-        <p:nvSpPr>
-          <p:cNvPr id="13" name="TextBox 12"/>
-          <p:cNvSpPr txBox="1"/>
-          <p:nvPr/>
-        </p:nvSpPr>
-        <p:spPr>
-          <a:xfrm>
-            <a:off x="612648" y="3191256"/>
-            <a:ext cx="2249424" cy="347472"/>
-          </a:xfrm>
-          <a:prstGeom prst="rect">
-            <a:avLst/>
-          </a:prstGeom>
-          <a:noFill/>
-        </p:spPr>
-        <p:txBody>
-          <a:bodyPr wrap="square">
-            <a:spAutoFit/>
-          </a:bodyPr>
-          <a:lstStyle/>
-          <a:p>
-            <a:pPr algn="l"/>
-            <a:r>
-              <a:rPr sz="1000" b="0" i="0">
+              <a:t>▸ Year-End Budget Sprint</a:t>
+            </a:r>
+          </a:p>
+        </p:txBody>
+      </p:sp>
+      <p:sp>
+        <p:nvSpPr>
+          <p:cNvPr id="14" name="TextBox 13"/>
+          <p:cNvSpPr txBox="1"/>
+          <p:nvPr/>
+        </p:nvSpPr>
+        <p:spPr>
+          <a:xfrm>
+            <a:off x="612648" y="3410712"/>
+            <a:ext cx="2249424" cy="310896"/>
+          </a:xfrm>
+          <a:prstGeom prst="rect">
+            <a:avLst/>
+          </a:prstGeom>
+          <a:noFill/>
+        </p:spPr>
+        <p:txBody>
+          <a:bodyPr wrap="square">
+            <a:spAutoFit/>
+          </a:bodyPr>
+          <a:lstStyle/>
+          <a:p>
+            <a:pPr algn="l"/>
+            <a:r>
+              <a:rPr sz="900" b="0" i="0">
                 <a:solidFill>
                   <a:srgbClr val="E0E6F0"/>
                 </a:solidFill>
               </a:rPr>
-              <a:t>▸ Year-End Budget Sprint</a:t>
-            </a:r>
-          </a:p>
-        </p:txBody>
-      </p:sp>
-      <p:sp>
-        <p:nvSpPr>
-          <p:cNvPr id="14" name="TextBox 13"/>
-          <p:cNvSpPr txBox="1"/>
-          <p:nvPr/>
-        </p:nvSpPr>
-        <p:spPr>
-          <a:xfrm>
-            <a:off x="612648" y="3575304"/>
-            <a:ext cx="2249424" cy="347472"/>
-          </a:xfrm>
-          <a:prstGeom prst="rect">
-            <a:avLst/>
-          </a:prstGeom>
-          <a:noFill/>
-        </p:spPr>
-        <p:txBody>
-          <a:bodyPr wrap="square">
-            <a:spAutoFit/>
-          </a:bodyPr>
-          <a:lstStyle/>
-          <a:p>
-            <a:pPr algn="l"/>
-            <a:r>
-              <a:rPr sz="1000" b="0" i="0">
+              <a:t>▸ Doc Refresh</a:t>
+            </a:r>
+          </a:p>
+        </p:txBody>
+      </p:sp>
+      <p:sp>
+        <p:nvSpPr>
+          <p:cNvPr id="15" name="TextBox 14"/>
+          <p:cNvSpPr txBox="1"/>
+          <p:nvPr/>
+        </p:nvSpPr>
+        <p:spPr>
+          <a:xfrm>
+            <a:off x="612648" y="3739896"/>
+            <a:ext cx="2249424" cy="310896"/>
+          </a:xfrm>
+          <a:prstGeom prst="rect">
+            <a:avLst/>
+          </a:prstGeom>
+          <a:noFill/>
+        </p:spPr>
+        <p:txBody>
+          <a:bodyPr wrap="square">
+            <a:spAutoFit/>
+          </a:bodyPr>
+          <a:lstStyle/>
+          <a:p>
+            <a:pPr algn="l"/>
+            <a:r>
+              <a:rPr sz="900" b="0" i="0">
                 <a:solidFill>
                   <a:srgbClr val="E0E6F0"/>
                 </a:solidFill>
               </a:rPr>
-              <a:t>▸ Doc Refresh</a:t>
-            </a:r>
-          </a:p>
-        </p:txBody>
-      </p:sp>
-      <p:sp>
-        <p:nvSpPr>
-          <p:cNvPr id="15" name="TextBox 14"/>
-          <p:cNvSpPr txBox="1"/>
-          <p:nvPr/>
-        </p:nvSpPr>
-        <p:spPr>
-          <a:xfrm>
-            <a:off x="612648" y="3959352"/>
-            <a:ext cx="2249424" cy="347472"/>
-          </a:xfrm>
-          <a:prstGeom prst="rect">
-            <a:avLst/>
-          </a:prstGeom>
-          <a:noFill/>
-        </p:spPr>
-        <p:txBody>
-          <a:bodyPr wrap="square">
-            <a:spAutoFit/>
-          </a:bodyPr>
-          <a:lstStyle/>
-          <a:p>
-            <a:pPr algn="l"/>
-            <a:r>
-              <a:rPr sz="1000" b="0" i="0">
+              <a:t>▸ ATO Package Builder</a:t>
+            </a:r>
+          </a:p>
+        </p:txBody>
+      </p:sp>
+      <p:sp>
+        <p:nvSpPr>
+          <p:cNvPr id="16" name="TextBox 15"/>
+          <p:cNvSpPr txBox="1"/>
+          <p:nvPr/>
+        </p:nvSpPr>
+        <p:spPr>
+          <a:xfrm>
+            <a:off x="612648" y="4069080"/>
+            <a:ext cx="2249424" cy="310896"/>
+          </a:xfrm>
+          <a:prstGeom prst="rect">
+            <a:avLst/>
+          </a:prstGeom>
+          <a:noFill/>
+        </p:spPr>
+        <p:txBody>
+          <a:bodyPr wrap="square">
+            <a:spAutoFit/>
+          </a:bodyPr>
+          <a:lstStyle/>
+          <a:p>
+            <a:pPr algn="l"/>
+            <a:r>
+              <a:rPr sz="900" b="0" i="0">
                 <a:solidFill>
                   <a:srgbClr val="E0E6F0"/>
                 </a:solidFill>
               </a:rPr>
-              <a:t>▸ Custom Intake...</a:t>
-            </a:r>
-          </a:p>
-        </p:txBody>
-      </p:sp>
-      <p:sp>
-        <p:nvSpPr>
-          <p:cNvPr id="16" name="TextBox 15"/>
+              <a:t>▸ CDRL Generator</a:t>
+            </a:r>
+          </a:p>
+        </p:txBody>
+      </p:sp>
+      <p:sp>
+        <p:nvSpPr>
+          <p:cNvPr id="17" name="TextBox 16"/>
+          <p:cNvSpPr txBox="1"/>
+          <p:nvPr/>
+        </p:nvSpPr>
+        <p:spPr>
+          <a:xfrm>
+            <a:off x="612648" y="4398264"/>
+            <a:ext cx="2249424" cy="310896"/>
+          </a:xfrm>
+          <a:prstGeom prst="rect">
+            <a:avLst/>
+          </a:prstGeom>
+          <a:noFill/>
+        </p:spPr>
+        <p:txBody>
+          <a:bodyPr wrap="square">
+            <a:spAutoFit/>
+          </a:bodyPr>
+          <a:lstStyle/>
+          <a:p>
+            <a:pPr algn="l"/>
+            <a:r>
+              <a:rPr sz="900" b="0" i="0">
+                <a:solidFill>
+                  <a:srgbClr val="E0E6F0"/>
+                </a:solidFill>
+              </a:rPr>
+              <a:t>▸ Incident Response Plan</a:t>
+            </a:r>
+          </a:p>
+        </p:txBody>
+      </p:sp>
+      <p:sp>
+        <p:nvSpPr>
+          <p:cNvPr id="18" name="TextBox 17"/>
+          <p:cNvSpPr txBox="1"/>
+          <p:nvPr/>
+        </p:nvSpPr>
+        <p:spPr>
+          <a:xfrm>
+            <a:off x="612648" y="4727448"/>
+            <a:ext cx="2249424" cy="310896"/>
+          </a:xfrm>
+          <a:prstGeom prst="rect">
+            <a:avLst/>
+          </a:prstGeom>
+          <a:noFill/>
+        </p:spPr>
+        <p:txBody>
+          <a:bodyPr wrap="square">
+            <a:spAutoFit/>
+          </a:bodyPr>
+          <a:lstStyle/>
+          <a:p>
+            <a:pPr algn="l"/>
+            <a:r>
+              <a:rPr sz="900" b="0" i="0">
+                <a:solidFill>
+                  <a:srgbClr val="E0E6F0"/>
+                </a:solidFill>
+              </a:rPr>
+              <a:t>▸ SBOM Attestation</a:t>
+            </a:r>
+          </a:p>
+        </p:txBody>
+      </p:sp>
+      <p:sp>
+        <p:nvSpPr>
+          <p:cNvPr id="19" name="TextBox 18"/>
+          <p:cNvSpPr txBox="1"/>
+          <p:nvPr/>
+        </p:nvSpPr>
+        <p:spPr>
+          <a:xfrm>
+            <a:off x="612648" y="5056632"/>
+            <a:ext cx="2249424" cy="310896"/>
+          </a:xfrm>
+          <a:prstGeom prst="rect">
+            <a:avLst/>
+          </a:prstGeom>
+          <a:noFill/>
+        </p:spPr>
+        <p:txBody>
+          <a:bodyPr wrap="square">
+            <a:spAutoFit/>
+          </a:bodyPr>
+          <a:lstStyle/>
+          <a:p>
+            <a:pPr algn="l"/>
+            <a:r>
+              <a:rPr sz="900" b="0" i="0">
+                <a:solidFill>
+                  <a:srgbClr val="1E3A5F"/>
+                </a:solidFill>
+              </a:rPr>
+              <a:t>▸ +5 more...</a:t>
+            </a:r>
+          </a:p>
+        </p:txBody>
+      </p:sp>
+      <p:sp>
+        <p:nvSpPr>
+          <p:cNvPr id="20" name="TextBox 19"/>
           <p:cNvSpPr txBox="1"/>
           <p:nvPr/>
         </p:nvSpPr>
@@ -22588,7 +22724,7 @@
       </p:sp>
       <p:sp>
         <p:nvSpPr>
-          <p:cNvPr id="17" name="TextBox 16"/>
+          <p:cNvPr id="21" name="TextBox 20"/>
           <p:cNvSpPr txBox="1"/>
           <p:nvPr/>
         </p:nvSpPr>
@@ -22622,7 +22758,7 @@
       </p:sp>
       <p:sp>
         <p:nvSpPr>
-          <p:cNvPr id="18" name="TextBox 17"/>
+          <p:cNvPr id="22" name="TextBox 21"/>
           <p:cNvSpPr txBox="1"/>
           <p:nvPr/>
         </p:nvSpPr>
@@ -22656,7 +22792,7 @@
       </p:sp>
       <p:sp>
         <p:nvSpPr>
-          <p:cNvPr id="19" name="TextBox 18"/>
+          <p:cNvPr id="23" name="TextBox 22"/>
           <p:cNvSpPr txBox="1"/>
           <p:nvPr/>
         </p:nvSpPr>
@@ -22690,7 +22826,7 @@
       </p:sp>
       <p:sp>
         <p:nvSpPr>
-          <p:cNvPr id="20" name="TextBox 19"/>
+          <p:cNvPr id="24" name="TextBox 23"/>
           <p:cNvSpPr txBox="1"/>
           <p:nvPr/>
         </p:nvSpPr>
@@ -22724,7 +22860,7 @@
       </p:sp>
       <p:sp>
         <p:nvSpPr>
-          <p:cNvPr id="21" name="TextBox 20"/>
+          <p:cNvPr id="25" name="TextBox 24"/>
           <p:cNvSpPr txBox="1"/>
           <p:nvPr/>
         </p:nvSpPr>
@@ -22758,7 +22894,7 @@
       </p:sp>
       <p:sp>
         <p:nvSpPr>
-          <p:cNvPr id="22" name="TextBox 21"/>
+          <p:cNvPr id="26" name="TextBox 25"/>
           <p:cNvSpPr txBox="1"/>
           <p:nvPr/>
         </p:nvSpPr>
@@ -22792,7 +22928,7 @@
       </p:sp>
       <p:sp>
         <p:nvSpPr>
-          <p:cNvPr id="23" name="TextBox 22"/>
+          <p:cNvPr id="27" name="TextBox 26"/>
           <p:cNvSpPr txBox="1"/>
           <p:nvPr/>
         </p:nvSpPr>
@@ -22826,7 +22962,7 @@
       </p:sp>
       <p:sp>
         <p:nvSpPr>
-          <p:cNvPr id="24" name="TextBox 23"/>
+          <p:cNvPr id="28" name="TextBox 27"/>
           <p:cNvSpPr txBox="1"/>
           <p:nvPr/>
         </p:nvSpPr>
@@ -22860,7 +22996,7 @@
       </p:sp>
       <p:sp>
         <p:nvSpPr>
-          <p:cNvPr id="25" name="TextBox 24"/>
+          <p:cNvPr id="29" name="TextBox 28"/>
           <p:cNvSpPr txBox="1"/>
           <p:nvPr/>
         </p:nvSpPr>
@@ -22894,7 +23030,7 @@
       </p:sp>
       <p:sp>
         <p:nvSpPr>
-          <p:cNvPr id="26" name="TextBox 25"/>
+          <p:cNvPr id="30" name="TextBox 29"/>
           <p:cNvSpPr txBox="1"/>
           <p:nvPr/>
         </p:nvSpPr>
@@ -22928,7 +23064,7 @@
       </p:sp>
       <p:sp>
         <p:nvSpPr>
-          <p:cNvPr id="27" name="TextBox 26"/>
+          <p:cNvPr id="31" name="TextBox 30"/>
           <p:cNvSpPr txBox="1"/>
           <p:nvPr/>
         </p:nvSpPr>
@@ -22962,7 +23098,7 @@
       </p:sp>
       <p:sp>
         <p:nvSpPr>
-          <p:cNvPr id="28" name="TextBox 27"/>
+          <p:cNvPr id="32" name="TextBox 31"/>
           <p:cNvSpPr txBox="1"/>
           <p:nvPr/>
         </p:nvSpPr>
@@ -22996,7 +23132,7 @@
       </p:sp>
       <p:sp>
         <p:nvSpPr>
-          <p:cNvPr id="29" name="TextBox 28"/>
+          <p:cNvPr id="33" name="TextBox 32"/>
           <p:cNvSpPr txBox="1"/>
           <p:nvPr/>
         </p:nvSpPr>
@@ -23030,7 +23166,7 @@
       </p:sp>
       <p:sp>
         <p:nvSpPr>
-          <p:cNvPr id="30" name="TextBox 29"/>
+          <p:cNvPr id="34" name="TextBox 33"/>
           <p:cNvSpPr txBox="1"/>
           <p:nvPr/>
         </p:nvSpPr>
@@ -23064,7 +23200,7 @@
       </p:sp>
       <p:sp>
         <p:nvSpPr>
-          <p:cNvPr id="31" name="TextBox 30"/>
+          <p:cNvPr id="35" name="TextBox 34"/>
           <p:cNvSpPr txBox="1"/>
           <p:nvPr/>
         </p:nvSpPr>
@@ -23098,7 +23234,7 @@
       </p:sp>
       <p:sp>
         <p:nvSpPr>
-          <p:cNvPr id="32" name="TextBox 31"/>
+          <p:cNvPr id="36" name="TextBox 35"/>
           <p:cNvSpPr txBox="1"/>
           <p:nvPr/>
         </p:nvSpPr>
@@ -23132,7 +23268,7 @@
       </p:sp>
       <p:sp>
         <p:nvSpPr>
-          <p:cNvPr id="33" name="TextBox 32"/>
+          <p:cNvPr id="37" name="TextBox 36"/>
           <p:cNvSpPr txBox="1"/>
           <p:nvPr/>
         </p:nvSpPr>
@@ -23166,7 +23302,7 @@
       </p:sp>
       <p:sp>
         <p:nvSpPr>
-          <p:cNvPr id="34" name="TextBox 33"/>
+          <p:cNvPr id="38" name="TextBox 37"/>
           <p:cNvSpPr txBox="1"/>
           <p:nvPr/>
         </p:nvSpPr>
@@ -23200,7 +23336,7 @@
       </p:sp>
       <p:sp>
         <p:nvSpPr>
-          <p:cNvPr id="35" name="TextBox 34"/>
+          <p:cNvPr id="39" name="TextBox 38"/>
           <p:cNvSpPr txBox="1"/>
           <p:nvPr/>
         </p:nvSpPr>
@@ -23234,7 +23370,7 @@
       </p:sp>
       <p:sp>
         <p:nvSpPr>
-          <p:cNvPr id="36" name="TextBox 35"/>
+          <p:cNvPr id="40" name="TextBox 39"/>
           <p:cNvSpPr txBox="1"/>
           <p:nvPr/>
         </p:nvSpPr>
@@ -23268,7 +23404,7 @@
       </p:sp>
       <p:sp>
         <p:nvSpPr>
-          <p:cNvPr id="37" name="TextBox 36"/>
+          <p:cNvPr id="41" name="TextBox 40"/>
           <p:cNvSpPr txBox="1"/>
           <p:nvPr/>
         </p:nvSpPr>
@@ -23302,7 +23438,7 @@
       </p:sp>
       <p:sp>
         <p:nvSpPr>
-          <p:cNvPr id="38" name="TextBox 37"/>
+          <p:cNvPr id="42" name="TextBox 41"/>
           <p:cNvSpPr txBox="1"/>
           <p:nvPr/>
         </p:nvSpPr>
@@ -23336,7 +23472,7 @@
       </p:sp>
       <p:sp>
         <p:nvSpPr>
-          <p:cNvPr id="39" name="TextBox 38"/>
+          <p:cNvPr id="43" name="TextBox 42"/>
           <p:cNvSpPr txBox="1"/>
           <p:nvPr/>
         </p:nvSpPr>
@@ -23370,7 +23506,7 @@
       </p:sp>
       <p:sp>
         <p:nvSpPr>
-          <p:cNvPr id="40" name="TextBox 39"/>
+          <p:cNvPr id="44" name="TextBox 43"/>
           <p:cNvSpPr txBox="1"/>
           <p:nvPr/>
         </p:nvSpPr>
@@ -23457,7 +23593,7 @@
                   <a:srgbClr val="C8A951"/>
                 </a:solidFill>
               </a:rPr>
-              <a:t>Three Use Cases. Real Problems. Minutes to Launch.</a:t>
+              <a:t>13 Use Cases. Real Problems. Minutes to Launch.</a:t>
             </a:r>
           </a:p>
         </p:txBody>
@@ -23616,7 +23752,7 @@
         <p:spPr>
           <a:xfrm>
             <a:off x="502920" y="1874519"/>
-            <a:ext cx="3666744" cy="4297680"/>
+            <a:ext cx="3666744" cy="2788920"/>
           </a:xfrm>
           <a:prstGeom prst="rect">
             <a:avLst/>
@@ -23660,23 +23796,23 @@
         </p:nvSpPr>
         <p:spPr>
           <a:xfrm>
-            <a:off x="612648" y="1984247"/>
-            <a:ext cx="3447288" cy="438912"/>
-          </a:xfrm>
-          <a:prstGeom prst="rect">
-            <a:avLst/>
-          </a:prstGeom>
-          <a:noFill/>
-        </p:spPr>
-        <p:txBody>
-          <a:bodyPr wrap="square">
-            <a:spAutoFit/>
-          </a:bodyPr>
-          <a:lstStyle/>
-          <a:p>
-            <a:pPr algn="l"/>
-            <a:r>
-              <a:rPr sz="1400" b="1" i="0">
+            <a:off x="612648" y="1965959"/>
+            <a:ext cx="3447288" cy="384048"/>
+          </a:xfrm>
+          <a:prstGeom prst="rect">
+            <a:avLst/>
+          </a:prstGeom>
+          <a:noFill/>
+        </p:spPr>
+        <p:txBody>
+          <a:bodyPr wrap="square">
+            <a:spAutoFit/>
+          </a:bodyPr>
+          <a:lstStyle/>
+          <a:p>
+            <a:pPr algn="l"/>
+            <a:r>
+              <a:rPr sz="1300" b="1" i="0">
                 <a:solidFill>
                   <a:srgbClr val="C8A951"/>
                 </a:solidFill>
@@ -23694,8 +23830,8 @@
         </p:nvSpPr>
         <p:spPr>
           <a:xfrm>
-            <a:off x="612648" y="2441447"/>
-            <a:ext cx="3447288" cy="256032"/>
+            <a:off x="612648" y="2368295"/>
+            <a:ext cx="3447288" cy="237744"/>
           </a:xfrm>
           <a:prstGeom prst="rect">
             <a:avLst/>
@@ -23728,7 +23864,7 @@
         </p:nvSpPr>
         <p:spPr>
           <a:xfrm>
-            <a:off x="612648" y="2743199"/>
+            <a:off x="612648" y="2642615"/>
             <a:ext cx="3447288" cy="27432"/>
           </a:xfrm>
           <a:prstGeom prst="rect">
@@ -23771,28 +23907,28 @@
         </p:nvSpPr>
         <p:spPr>
           <a:xfrm>
-            <a:off x="612648" y="2862071"/>
-            <a:ext cx="3447288" cy="365760"/>
-          </a:xfrm>
-          <a:prstGeom prst="rect">
-            <a:avLst/>
-          </a:prstGeom>
-          <a:noFill/>
-        </p:spPr>
-        <p:txBody>
-          <a:bodyPr wrap="square">
-            <a:spAutoFit/>
-          </a:bodyPr>
-          <a:lstStyle/>
-          <a:p>
-            <a:pPr algn="l"/>
-            <a:r>
-              <a:rPr sz="1000" b="0" i="0">
+            <a:off x="612648" y="2743199"/>
+            <a:ext cx="3447288" cy="347472"/>
+          </a:xfrm>
+          <a:prstGeom prst="rect">
+            <a:avLst/>
+          </a:prstGeom>
+          <a:noFill/>
+        </p:spPr>
+        <p:txBody>
+          <a:bodyPr wrap="square">
+            <a:spAutoFit/>
+          </a:bodyPr>
+          <a:lstStyle/>
+          <a:p>
+            <a:pPr algn="l"/>
+            <a:r>
+              <a:rPr sz="950" b="0" i="0">
                 <a:solidFill>
                   <a:srgbClr val="E0E6F0"/>
                 </a:solidFill>
               </a:rPr>
-              <a:t>▸  Start: Describe your legacy system.</a:t>
+              <a:t>▸  Describe your legacy system in plain English.</a:t>
             </a:r>
           </a:p>
         </p:txBody>
@@ -23805,23 +23941,23 @@
         </p:nvSpPr>
         <p:spPr>
           <a:xfrm>
-            <a:off x="612648" y="3264407"/>
-            <a:ext cx="3447288" cy="365760"/>
-          </a:xfrm>
-          <a:prstGeom prst="rect">
-            <a:avLst/>
-          </a:prstGeom>
-          <a:noFill/>
-        </p:spPr>
-        <p:txBody>
-          <a:bodyPr wrap="square">
-            <a:spAutoFit/>
-          </a:bodyPr>
-          <a:lstStyle/>
-          <a:p>
-            <a:pPr algn="l"/>
-            <a:r>
-              <a:rPr sz="1000" b="0" i="0">
+            <a:off x="612648" y="3108959"/>
+            <a:ext cx="3447288" cy="347472"/>
+          </a:xfrm>
+          <a:prstGeom prst="rect">
+            <a:avLst/>
+          </a:prstGeom>
+          <a:noFill/>
+        </p:spPr>
+        <p:txBody>
+          <a:bodyPr wrap="square">
+            <a:spAutoFit/>
+          </a:bodyPr>
+          <a:lstStyle/>
+          <a:p>
+            <a:pPr algn="l"/>
+            <a:r>
+              <a:rPr sz="950" b="0" i="0">
                 <a:solidFill>
                   <a:srgbClr val="E0E6F0"/>
                 </a:solidFill>
@@ -23839,28 +23975,28 @@
         </p:nvSpPr>
         <p:spPr>
           <a:xfrm>
-            <a:off x="612648" y="3666743"/>
-            <a:ext cx="3447288" cy="365760"/>
-          </a:xfrm>
-          <a:prstGeom prst="rect">
-            <a:avLst/>
-          </a:prstGeom>
-          <a:noFill/>
-        </p:spPr>
-        <p:txBody>
-          <a:bodyPr wrap="square">
-            <a:spAutoFit/>
-          </a:bodyPr>
-          <a:lstStyle/>
-          <a:p>
-            <a:pPr algn="l"/>
-            <a:r>
-              <a:rPr sz="1000" b="0" i="0">
+            <a:off x="612648" y="3474719"/>
+            <a:ext cx="3447288" cy="347472"/>
+          </a:xfrm>
+          <a:prstGeom prst="rect">
+            <a:avLst/>
+          </a:prstGeom>
+          <a:noFill/>
+        </p:spPr>
+        <p:txBody>
+          <a:bodyPr wrap="square">
+            <a:spAutoFit/>
+          </a:bodyPr>
+          <a:lstStyle/>
+          <a:p>
+            <a:pPr algn="l"/>
+            <a:r>
+              <a:rPr sz="950" b="0" i="0">
                 <a:solidFill>
                   <a:srgbClr val="E0E6F0"/>
                 </a:solidFill>
               </a:rPr>
-              <a:t>▸  Get 3 COAs: Speed / Balanced / Comprehensive.</a:t>
+              <a:t>▸  3 COAs: Speed / Balanced / Comprehensive.</a:t>
             </a:r>
           </a:p>
         </p:txBody>
@@ -23873,23 +24009,23 @@
         </p:nvSpPr>
         <p:spPr>
           <a:xfrm>
-            <a:off x="612648" y="4069079"/>
-            <a:ext cx="3447288" cy="365760"/>
-          </a:xfrm>
-          <a:prstGeom prst="rect">
-            <a:avLst/>
-          </a:prstGeom>
-          <a:noFill/>
-        </p:spPr>
-        <p:txBody>
-          <a:bodyPr wrap="square">
-            <a:spAutoFit/>
-          </a:bodyPr>
-          <a:lstStyle/>
-          <a:p>
-            <a:pPr algn="l"/>
-            <a:r>
-              <a:rPr sz="1000" b="0" i="0">
+            <a:off x="612648" y="3840479"/>
+            <a:ext cx="3447288" cy="347472"/>
+          </a:xfrm>
+          <a:prstGeom prst="rect">
+            <a:avLst/>
+          </a:prstGeom>
+          <a:noFill/>
+        </p:spPr>
+        <p:txBody>
+          <a:bodyPr wrap="square">
+            <a:spAutoFit/>
+          </a:bodyPr>
+          <a:lstStyle/>
+          <a:p>
+            <a:pPr algn="l"/>
+            <a:r>
+              <a:rPr sz="950" b="0" i="0">
                 <a:solidFill>
                   <a:srgbClr val="E0E6F0"/>
                 </a:solidFill>
@@ -23907,110 +24043,42 @@
         </p:nvSpPr>
         <p:spPr>
           <a:xfrm>
-            <a:off x="612648" y="4471415"/>
-            <a:ext cx="3447288" cy="365760"/>
-          </a:xfrm>
-          <a:prstGeom prst="rect">
-            <a:avLst/>
-          </a:prstGeom>
-          <a:noFill/>
-        </p:spPr>
-        <p:txBody>
-          <a:bodyPr wrap="square">
-            <a:spAutoFit/>
-          </a:bodyPr>
-          <a:lstStyle/>
-          <a:p>
-            <a:pPr algn="l"/>
-            <a:r>
-              <a:rPr sz="1000" b="0" i="0">
+            <a:off x="612648" y="4206239"/>
+            <a:ext cx="3447288" cy="347472"/>
+          </a:xfrm>
+          <a:prstGeom prst="rect">
+            <a:avLst/>
+          </a:prstGeom>
+          <a:noFill/>
+        </p:spPr>
+        <p:txBody>
+          <a:bodyPr wrap="square">
+            <a:spAutoFit/>
+          </a:bodyPr>
+          <a:lstStyle/>
+          <a:p>
+            <a:pPr algn="l"/>
+            <a:r>
+              <a:rPr sz="950" b="0" i="0">
                 <a:solidFill>
                   <a:srgbClr val="E0E6F0"/>
                 </a:solidFill>
               </a:rPr>
-              <a:t>▸  ATO bridge maintained throughout.</a:t>
-            </a:r>
-          </a:p>
-        </p:txBody>
-      </p:sp>
-      <p:sp>
-        <p:nvSpPr>
-          <p:cNvPr id="16" name="TextBox 15"/>
-          <p:cNvSpPr txBox="1"/>
-          <p:nvPr/>
-        </p:nvSpPr>
-        <p:spPr>
-          <a:xfrm>
-            <a:off x="612648" y="4873751"/>
-            <a:ext cx="3447288" cy="365760"/>
-          </a:xfrm>
-          <a:prstGeom prst="rect">
-            <a:avLst/>
-          </a:prstGeom>
-          <a:noFill/>
-        </p:spPr>
-        <p:txBody>
-          <a:bodyPr wrap="square">
-            <a:spAutoFit/>
-          </a:bodyPr>
-          <a:lstStyle/>
-          <a:p>
-            <a:pPr algn="l"/>
-            <a:r>
-              <a:rPr sz="1000" b="0" i="0">
-                <a:solidFill>
-                  <a:srgbClr val="E0E6F0"/>
-                </a:solidFill>
-              </a:rPr>
-              <a:t>▸  Output: phased migration plan with</a:t>
-            </a:r>
-          </a:p>
-        </p:txBody>
-      </p:sp>
-      <p:sp>
-        <p:nvSpPr>
-          <p:cNvPr id="17" name="TextBox 16"/>
-          <p:cNvSpPr txBox="1"/>
-          <p:nvPr/>
-        </p:nvSpPr>
-        <p:spPr>
-          <a:xfrm>
-            <a:off x="612648" y="5276087"/>
-            <a:ext cx="3447288" cy="365760"/>
-          </a:xfrm>
-          <a:prstGeom prst="rect">
-            <a:avLst/>
-          </a:prstGeom>
-          <a:noFill/>
-        </p:spPr>
-        <p:txBody>
-          <a:bodyPr wrap="square">
-            <a:spAutoFit/>
-          </a:bodyPr>
-          <a:lstStyle/>
-          <a:p>
-            <a:pPr algn="l"/>
-            <a:r>
-              <a:rPr sz="1000" b="0" i="0">
-                <a:solidFill>
-                  <a:srgbClr val="E0E6F0"/>
-                </a:solidFill>
-              </a:rPr>
-              <a:t>▸    rollback runbooks, IaC, and timeline.</a:t>
-            </a:r>
-          </a:p>
-        </p:txBody>
-      </p:sp>
-      <p:sp>
-        <p:nvSpPr>
-          <p:cNvPr id="18" name="Rectangle 17"/>
+              <a:t>▸  Output: migration plan with IaC and timeline.</a:t>
+            </a:r>
+          </a:p>
+        </p:txBody>
+      </p:sp>
+      <p:sp>
+        <p:nvSpPr>
+          <p:cNvPr id="16" name="Rectangle 15"/>
           <p:cNvSpPr/>
           <p:nvPr/>
         </p:nvSpPr>
         <p:spPr>
           <a:xfrm>
             <a:off x="4261104" y="1874519"/>
-            <a:ext cx="3666744" cy="4297680"/>
+            <a:ext cx="3666744" cy="2788920"/>
           </a:xfrm>
           <a:prstGeom prst="rect">
             <a:avLst/>
@@ -24048,29 +24116,29 @@
       </p:sp>
       <p:sp>
         <p:nvSpPr>
-          <p:cNvPr id="19" name="TextBox 18"/>
-          <p:cNvSpPr txBox="1"/>
-          <p:nvPr/>
-        </p:nvSpPr>
-        <p:spPr>
-          <a:xfrm>
-            <a:off x="4370832" y="1984247"/>
-            <a:ext cx="3447288" cy="438912"/>
-          </a:xfrm>
-          <a:prstGeom prst="rect">
-            <a:avLst/>
-          </a:prstGeom>
-          <a:noFill/>
-        </p:spPr>
-        <p:txBody>
-          <a:bodyPr wrap="square">
-            <a:spAutoFit/>
-          </a:bodyPr>
-          <a:lstStyle/>
-          <a:p>
-            <a:pPr algn="l"/>
-            <a:r>
-              <a:rPr sz="1400" b="1" i="0">
+          <p:cNvPr id="17" name="TextBox 16"/>
+          <p:cNvSpPr txBox="1"/>
+          <p:nvPr/>
+        </p:nvSpPr>
+        <p:spPr>
+          <a:xfrm>
+            <a:off x="4370832" y="1965959"/>
+            <a:ext cx="3447288" cy="384048"/>
+          </a:xfrm>
+          <a:prstGeom prst="rect">
+            <a:avLst/>
+          </a:prstGeom>
+          <a:noFill/>
+        </p:spPr>
+        <p:txBody>
+          <a:bodyPr wrap="square">
+            <a:spAutoFit/>
+          </a:bodyPr>
+          <a:lstStyle/>
+          <a:p>
+            <a:pPr algn="l"/>
+            <a:r>
+              <a:rPr sz="1300" b="1" i="0">
                 <a:solidFill>
                   <a:srgbClr val="2E86C1"/>
                 </a:solidFill>
@@ -24082,14 +24150,14 @@
       </p:sp>
       <p:sp>
         <p:nvSpPr>
-          <p:cNvPr id="20" name="TextBox 19"/>
-          <p:cNvSpPr txBox="1"/>
-          <p:nvPr/>
-        </p:nvSpPr>
-        <p:spPr>
-          <a:xfrm>
-            <a:off x="4370832" y="2441447"/>
-            <a:ext cx="3447288" cy="256032"/>
+          <p:cNvPr id="18" name="TextBox 17"/>
+          <p:cNvSpPr txBox="1"/>
+          <p:nvPr/>
+        </p:nvSpPr>
+        <p:spPr>
+          <a:xfrm>
+            <a:off x="4370832" y="2368295"/>
+            <a:ext cx="3447288" cy="237744"/>
           </a:xfrm>
           <a:prstGeom prst="rect">
             <a:avLst/>
@@ -24116,13 +24184,13 @@
       </p:sp>
       <p:sp>
         <p:nvSpPr>
-          <p:cNvPr id="21" name="Rectangle 20"/>
+          <p:cNvPr id="19" name="Rectangle 18"/>
           <p:cNvSpPr/>
           <p:nvPr/>
         </p:nvSpPr>
         <p:spPr>
           <a:xfrm>
-            <a:off x="4370832" y="2743199"/>
+            <a:off x="4370832" y="2642615"/>
             <a:ext cx="3447288" cy="27432"/>
           </a:xfrm>
           <a:prstGeom prst="rect">
@@ -24159,34 +24227,102 @@
       </p:sp>
       <p:sp>
         <p:nvSpPr>
+          <p:cNvPr id="20" name="TextBox 19"/>
+          <p:cNvSpPr txBox="1"/>
+          <p:nvPr/>
+        </p:nvSpPr>
+        <p:spPr>
+          <a:xfrm>
+            <a:off x="4370832" y="2743199"/>
+            <a:ext cx="3447288" cy="347472"/>
+          </a:xfrm>
+          <a:prstGeom prst="rect">
+            <a:avLst/>
+          </a:prstGeom>
+          <a:noFill/>
+        </p:spPr>
+        <p:txBody>
+          <a:bodyPr wrap="square">
+            <a:spAutoFit/>
+          </a:bodyPr>
+          <a:lstStyle/>
+          <a:p>
+            <a:pPr algn="l"/>
+            <a:r>
+              <a:rPr sz="950" b="0" i="0">
+                <a:solidFill>
+                  <a:srgbClr val="E0E6F0"/>
+                </a:solidFill>
+              </a:rPr>
+              <a:t>▸  What do you need to spend before FY-end?</a:t>
+            </a:r>
+          </a:p>
+        </p:txBody>
+      </p:sp>
+      <p:sp>
+        <p:nvSpPr>
+          <p:cNvPr id="21" name="TextBox 20"/>
+          <p:cNvSpPr txBox="1"/>
+          <p:nvPr/>
+        </p:nvSpPr>
+        <p:spPr>
+          <a:xfrm>
+            <a:off x="4370832" y="3108959"/>
+            <a:ext cx="3447288" cy="347472"/>
+          </a:xfrm>
+          <a:prstGeom prst="rect">
+            <a:avLst/>
+          </a:prstGeom>
+          <a:noFill/>
+        </p:spPr>
+        <p:txBody>
+          <a:bodyPr wrap="square">
+            <a:spAutoFit/>
+          </a:bodyPr>
+          <a:lstStyle/>
+          <a:p>
+            <a:pPr algn="l"/>
+            <a:r>
+              <a:rPr sz="950" b="0" i="0">
+                <a:solidFill>
+                  <a:srgbClr val="E0E6F0"/>
+                </a:solidFill>
+              </a:rPr>
+              <a:t>▸  ICDEV generates BOM, IGCE, and SOW in minutes.</a:t>
+            </a:r>
+          </a:p>
+        </p:txBody>
+      </p:sp>
+      <p:sp>
+        <p:nvSpPr>
           <p:cNvPr id="22" name="TextBox 21"/>
           <p:cNvSpPr txBox="1"/>
           <p:nvPr/>
         </p:nvSpPr>
         <p:spPr>
           <a:xfrm>
-            <a:off x="4370832" y="2862071"/>
-            <a:ext cx="3447288" cy="365760"/>
-          </a:xfrm>
-          <a:prstGeom prst="rect">
-            <a:avLst/>
-          </a:prstGeom>
-          <a:noFill/>
-        </p:spPr>
-        <p:txBody>
-          <a:bodyPr wrap="square">
-            <a:spAutoFit/>
-          </a:bodyPr>
-          <a:lstStyle/>
-          <a:p>
-            <a:pPr algn="l"/>
-            <a:r>
-              <a:rPr sz="1000" b="0" i="0">
+            <a:off x="4370832" y="3474719"/>
+            <a:ext cx="3447288" cy="347472"/>
+          </a:xfrm>
+          <a:prstGeom prst="rect">
+            <a:avLst/>
+          </a:prstGeom>
+          <a:noFill/>
+        </p:spPr>
+        <p:txBody>
+          <a:bodyPr wrap="square">
+            <a:spAutoFit/>
+          </a:bodyPr>
+          <a:lstStyle/>
+          <a:p>
+            <a:pPr algn="l"/>
+            <a:r>
+              <a:rPr sz="950" b="0" i="0">
                 <a:solidFill>
                   <a:srgbClr val="E0E6F0"/>
                 </a:solidFill>
               </a:rPr>
-              <a:t>▸  Start: What do you need to spend before FY-end?</a:t>
+              <a:t>▸  FAR/DFARS + Section 889 checked automatically.</a:t>
             </a:r>
           </a:p>
         </p:txBody>
@@ -24199,28 +24335,28 @@
         </p:nvSpPr>
         <p:spPr>
           <a:xfrm>
-            <a:off x="4370832" y="3264407"/>
-            <a:ext cx="3447288" cy="365760"/>
-          </a:xfrm>
-          <a:prstGeom prst="rect">
-            <a:avLst/>
-          </a:prstGeom>
-          <a:noFill/>
-        </p:spPr>
-        <p:txBody>
-          <a:bodyPr wrap="square">
-            <a:spAutoFit/>
-          </a:bodyPr>
-          <a:lstStyle/>
-          <a:p>
-            <a:pPr algn="l"/>
-            <a:r>
-              <a:rPr sz="1000" b="0" i="0">
+            <a:off x="4370832" y="3840479"/>
+            <a:ext cx="3447288" cy="347472"/>
+          </a:xfrm>
+          <a:prstGeom prst="rect">
+            <a:avLst/>
+          </a:prstGeom>
+          <a:noFill/>
+        </p:spPr>
+        <p:txBody>
+          <a:bodyPr wrap="square">
+            <a:spAutoFit/>
+          </a:bodyPr>
+          <a:lstStyle/>
+          <a:p>
+            <a:pPr algn="l"/>
+            <a:r>
+              <a:rPr sz="950" b="0" i="0">
                 <a:solidFill>
                   <a:srgbClr val="E0E6F0"/>
                 </a:solidFill>
               </a:rPr>
-              <a:t>▸  ICDEV generates BOM, IGCE, and SOW in minutes.</a:t>
+              <a:t>▸  Digital Twin projects budget vs. outcome.</a:t>
             </a:r>
           </a:p>
         </p:txBody>
@@ -24233,178 +24369,42 @@
         </p:nvSpPr>
         <p:spPr>
           <a:xfrm>
-            <a:off x="4370832" y="3666743"/>
-            <a:ext cx="3447288" cy="365760"/>
-          </a:xfrm>
-          <a:prstGeom prst="rect">
-            <a:avLst/>
-          </a:prstGeom>
-          <a:noFill/>
-        </p:spPr>
-        <p:txBody>
-          <a:bodyPr wrap="square">
-            <a:spAutoFit/>
-          </a:bodyPr>
-          <a:lstStyle/>
-          <a:p>
-            <a:pPr algn="l"/>
-            <a:r>
-              <a:rPr sz="1000" b="0" i="0">
+            <a:off x="4370832" y="4206239"/>
+            <a:ext cx="3447288" cy="347472"/>
+          </a:xfrm>
+          <a:prstGeom prst="rect">
+            <a:avLst/>
+          </a:prstGeom>
+          <a:noFill/>
+        </p:spPr>
+        <p:txBody>
+          <a:bodyPr wrap="square">
+            <a:spAutoFit/>
+          </a:bodyPr>
+          <a:lstStyle/>
+          <a:p>
+            <a:pPr algn="l"/>
+            <a:r>
+              <a:rPr sz="950" b="0" i="0">
                 <a:solidFill>
                   <a:srgbClr val="E0E6F0"/>
                 </a:solidFill>
               </a:rPr>
-              <a:t>▸  Tier 1 (execution-ready) vs Tier 2 (backup).</a:t>
-            </a:r>
-          </a:p>
-        </p:txBody>
-      </p:sp>
-      <p:sp>
-        <p:nvSpPr>
-          <p:cNvPr id="25" name="TextBox 24"/>
-          <p:cNvSpPr txBox="1"/>
-          <p:nvPr/>
-        </p:nvSpPr>
-        <p:spPr>
-          <a:xfrm>
-            <a:off x="4370832" y="4069079"/>
-            <a:ext cx="3447288" cy="365760"/>
-          </a:xfrm>
-          <a:prstGeom prst="rect">
-            <a:avLst/>
-          </a:prstGeom>
-          <a:noFill/>
-        </p:spPr>
-        <p:txBody>
-          <a:bodyPr wrap="square">
-            <a:spAutoFit/>
-          </a:bodyPr>
-          <a:lstStyle/>
-          <a:p>
-            <a:pPr algn="l"/>
-            <a:r>
-              <a:rPr sz="1000" b="0" i="0">
-                <a:solidFill>
-                  <a:srgbClr val="E0E6F0"/>
-                </a:solidFill>
-              </a:rPr>
-              <a:t>▸  FAR/DFARS + Section 889 checked automatically.</a:t>
-            </a:r>
-          </a:p>
-        </p:txBody>
-      </p:sp>
-      <p:sp>
-        <p:nvSpPr>
-          <p:cNvPr id="26" name="TextBox 25"/>
-          <p:cNvSpPr txBox="1"/>
-          <p:nvPr/>
-        </p:nvSpPr>
-        <p:spPr>
-          <a:xfrm>
-            <a:off x="4370832" y="4471415"/>
-            <a:ext cx="3447288" cy="365760"/>
-          </a:xfrm>
-          <a:prstGeom prst="rect">
-            <a:avLst/>
-          </a:prstGeom>
-          <a:noFill/>
-        </p:spPr>
-        <p:txBody>
-          <a:bodyPr wrap="square">
-            <a:spAutoFit/>
-          </a:bodyPr>
-          <a:lstStyle/>
-          <a:p>
-            <a:pPr algn="l"/>
-            <a:r>
-              <a:rPr sz="1000" b="0" i="0">
-                <a:solidFill>
-                  <a:srgbClr val="E0E6F0"/>
-                </a:solidFill>
-              </a:rPr>
-              <a:t>▸  Digital Twin projects budget vs. outcome.</a:t>
-            </a:r>
-          </a:p>
-        </p:txBody>
-      </p:sp>
-      <p:sp>
-        <p:nvSpPr>
-          <p:cNvPr id="27" name="TextBox 26"/>
-          <p:cNvSpPr txBox="1"/>
-          <p:nvPr/>
-        </p:nvSpPr>
-        <p:spPr>
-          <a:xfrm>
-            <a:off x="4370832" y="4873751"/>
-            <a:ext cx="3447288" cy="365760"/>
-          </a:xfrm>
-          <a:prstGeom prst="rect">
-            <a:avLst/>
-          </a:prstGeom>
-          <a:noFill/>
-        </p:spPr>
-        <p:txBody>
-          <a:bodyPr wrap="square">
-            <a:spAutoFit/>
-          </a:bodyPr>
-          <a:lstStyle/>
-          <a:p>
-            <a:pPr algn="l"/>
-            <a:r>
-              <a:rPr sz="1000" b="0" i="0">
-                <a:solidFill>
-                  <a:srgbClr val="E0E6F0"/>
-                </a:solidFill>
-              </a:rPr>
-              <a:t>▸  Output: CSV/XLSX BOM with lead times,</a:t>
-            </a:r>
-          </a:p>
-        </p:txBody>
-      </p:sp>
-      <p:sp>
-        <p:nvSpPr>
-          <p:cNvPr id="28" name="TextBox 27"/>
-          <p:cNvSpPr txBox="1"/>
-          <p:nvPr/>
-        </p:nvSpPr>
-        <p:spPr>
-          <a:xfrm>
-            <a:off x="4370832" y="5276087"/>
-            <a:ext cx="3447288" cy="365760"/>
-          </a:xfrm>
-          <a:prstGeom prst="rect">
-            <a:avLst/>
-          </a:prstGeom>
-          <a:noFill/>
-        </p:spPr>
-        <p:txBody>
-          <a:bodyPr wrap="square">
-            <a:spAutoFit/>
-          </a:bodyPr>
-          <a:lstStyle/>
-          <a:p>
-            <a:pPr algn="l"/>
-            <a:r>
-              <a:rPr sz="1000" b="0" i="0">
-                <a:solidFill>
-                  <a:srgbClr val="E0E6F0"/>
-                </a:solidFill>
-              </a:rPr>
-              <a:t>▸    vendor quotes, and contract vehicles.</a:t>
-            </a:r>
-          </a:p>
-        </p:txBody>
-      </p:sp>
-      <p:sp>
-        <p:nvSpPr>
-          <p:cNvPr id="29" name="Rectangle 28"/>
+              <a:t>▸  Output: CSV/XLSX BOM with contract vehicles.</a:t>
+            </a:r>
+          </a:p>
+        </p:txBody>
+      </p:sp>
+      <p:sp>
+        <p:nvSpPr>
+          <p:cNvPr id="25" name="Rectangle 24"/>
           <p:cNvSpPr/>
           <p:nvPr/>
         </p:nvSpPr>
         <p:spPr>
           <a:xfrm>
             <a:off x="8019288" y="1874519"/>
-            <a:ext cx="3666744" cy="4297680"/>
+            <a:ext cx="3666744" cy="2788920"/>
           </a:xfrm>
           <a:prstGeom prst="rect">
             <a:avLst/>
@@ -24442,29 +24442,29 @@
       </p:sp>
       <p:sp>
         <p:nvSpPr>
-          <p:cNvPr id="30" name="TextBox 29"/>
-          <p:cNvSpPr txBox="1"/>
-          <p:nvPr/>
-        </p:nvSpPr>
-        <p:spPr>
-          <a:xfrm>
-            <a:off x="8129016" y="1984247"/>
-            <a:ext cx="3447288" cy="438912"/>
-          </a:xfrm>
-          <a:prstGeom prst="rect">
-            <a:avLst/>
-          </a:prstGeom>
-          <a:noFill/>
-        </p:spPr>
-        <p:txBody>
-          <a:bodyPr wrap="square">
-            <a:spAutoFit/>
-          </a:bodyPr>
-          <a:lstStyle/>
-          <a:p>
-            <a:pPr algn="l"/>
-            <a:r>
-              <a:rPr sz="1400" b="1" i="0">
+          <p:cNvPr id="26" name="TextBox 25"/>
+          <p:cNvSpPr txBox="1"/>
+          <p:nvPr/>
+        </p:nvSpPr>
+        <p:spPr>
+          <a:xfrm>
+            <a:off x="8129016" y="1965959"/>
+            <a:ext cx="3447288" cy="384048"/>
+          </a:xfrm>
+          <a:prstGeom prst="rect">
+            <a:avLst/>
+          </a:prstGeom>
+          <a:noFill/>
+        </p:spPr>
+        <p:txBody>
+          <a:bodyPr wrap="square">
+            <a:spAutoFit/>
+          </a:bodyPr>
+          <a:lstStyle/>
+          <a:p>
+            <a:pPr algn="l"/>
+            <a:r>
+              <a:rPr sz="1300" b="1" i="0">
                 <a:solidFill>
                   <a:srgbClr val="17A58A"/>
                 </a:solidFill>
@@ -24476,14 +24476,14 @@
       </p:sp>
       <p:sp>
         <p:nvSpPr>
-          <p:cNvPr id="31" name="TextBox 30"/>
-          <p:cNvSpPr txBox="1"/>
-          <p:nvPr/>
-        </p:nvSpPr>
-        <p:spPr>
-          <a:xfrm>
-            <a:off x="8129016" y="2441447"/>
-            <a:ext cx="3447288" cy="256032"/>
+          <p:cNvPr id="27" name="TextBox 26"/>
+          <p:cNvSpPr txBox="1"/>
+          <p:nvPr/>
+        </p:nvSpPr>
+        <p:spPr>
+          <a:xfrm>
+            <a:off x="8129016" y="2368295"/>
+            <a:ext cx="3447288" cy="237744"/>
           </a:xfrm>
           <a:prstGeom prst="rect">
             <a:avLst/>
@@ -24510,13 +24510,13 @@
       </p:sp>
       <p:sp>
         <p:nvSpPr>
-          <p:cNvPr id="32" name="Rectangle 31"/>
+          <p:cNvPr id="28" name="Rectangle 27"/>
           <p:cNvSpPr/>
           <p:nvPr/>
         </p:nvSpPr>
         <p:spPr>
           <a:xfrm>
-            <a:off x="8129016" y="2743199"/>
+            <a:off x="8129016" y="2642615"/>
             <a:ext cx="3447288" cy="27432"/>
           </a:xfrm>
           <a:prstGeom prst="rect">
@@ -24553,34 +24553,170 @@
       </p:sp>
       <p:sp>
         <p:nvSpPr>
+          <p:cNvPr id="29" name="TextBox 28"/>
+          <p:cNvSpPr txBox="1"/>
+          <p:nvPr/>
+        </p:nvSpPr>
+        <p:spPr>
+          <a:xfrm>
+            <a:off x="8129016" y="2743199"/>
+            <a:ext cx="3447288" cy="347472"/>
+          </a:xfrm>
+          <a:prstGeom prst="rect">
+            <a:avLst/>
+          </a:prstGeom>
+          <a:noFill/>
+        </p:spPr>
+        <p:txBody>
+          <a:bodyPr wrap="square">
+            <a:spAutoFit/>
+          </a:bodyPr>
+          <a:lstStyle/>
+          <a:p>
+            <a:pPr algn="l"/>
+            <a:r>
+              <a:rPr sz="950" b="0" i="0">
+                <a:solidFill>
+                  <a:srgbClr val="E0E6F0"/>
+                </a:solidFill>
+              </a:rPr>
+              <a:t>▸  Which document is stale?</a:t>
+            </a:r>
+          </a:p>
+        </p:txBody>
+      </p:sp>
+      <p:sp>
+        <p:nvSpPr>
+          <p:cNvPr id="30" name="TextBox 29"/>
+          <p:cNvSpPr txBox="1"/>
+          <p:nvPr/>
+        </p:nvSpPr>
+        <p:spPr>
+          <a:xfrm>
+            <a:off x="8129016" y="3108959"/>
+            <a:ext cx="3447288" cy="347472"/>
+          </a:xfrm>
+          <a:prstGeom prst="rect">
+            <a:avLst/>
+          </a:prstGeom>
+          <a:noFill/>
+        </p:spPr>
+        <p:txBody>
+          <a:bodyPr wrap="square">
+            <a:spAutoFit/>
+          </a:bodyPr>
+          <a:lstStyle/>
+          <a:p>
+            <a:pPr algn="l"/>
+            <a:r>
+              <a:rPr sz="950" b="0" i="0">
+                <a:solidFill>
+                  <a:srgbClr val="E0E6F0"/>
+                </a:solidFill>
+              </a:rPr>
+              <a:t>▸  Staleness detected: dates, deprecated references.</a:t>
+            </a:r>
+          </a:p>
+        </p:txBody>
+      </p:sp>
+      <p:sp>
+        <p:nvSpPr>
+          <p:cNvPr id="31" name="TextBox 30"/>
+          <p:cNvSpPr txBox="1"/>
+          <p:nvPr/>
+        </p:nvSpPr>
+        <p:spPr>
+          <a:xfrm>
+            <a:off x="8129016" y="3474719"/>
+            <a:ext cx="3447288" cy="347472"/>
+          </a:xfrm>
+          <a:prstGeom prst="rect">
+            <a:avLst/>
+          </a:prstGeom>
+          <a:noFill/>
+        </p:spPr>
+        <p:txBody>
+          <a:bodyPr wrap="square">
+            <a:spAutoFit/>
+          </a:bodyPr>
+          <a:lstStyle/>
+          <a:p>
+            <a:pPr algn="l"/>
+            <a:r>
+              <a:rPr sz="950" b="0" i="0">
+                <a:solidFill>
+                  <a:srgbClr val="E0E6F0"/>
+                </a:solidFill>
+              </a:rPr>
+              <a:t>▸  Role-weighted crowd voting on edits.</a:t>
+            </a:r>
+          </a:p>
+        </p:txBody>
+      </p:sp>
+      <p:sp>
+        <p:nvSpPr>
+          <p:cNvPr id="32" name="TextBox 31"/>
+          <p:cNvSpPr txBox="1"/>
+          <p:nvPr/>
+        </p:nvSpPr>
+        <p:spPr>
+          <a:xfrm>
+            <a:off x="8129016" y="3840479"/>
+            <a:ext cx="3447288" cy="347472"/>
+          </a:xfrm>
+          <a:prstGeom prst="rect">
+            <a:avLst/>
+          </a:prstGeom>
+          <a:noFill/>
+        </p:spPr>
+        <p:txBody>
+          <a:bodyPr wrap="square">
+            <a:spAutoFit/>
+          </a:bodyPr>
+          <a:lstStyle/>
+          <a:p>
+            <a:pPr algn="l"/>
+            <a:r>
+              <a:rPr sz="950" b="0" i="0">
+                <a:solidFill>
+                  <a:srgbClr val="E0E6F0"/>
+                </a:solidFill>
+              </a:rPr>
+              <a:t>▸  AI rebuilds approved sections.</a:t>
+            </a:r>
+          </a:p>
+        </p:txBody>
+      </p:sp>
+      <p:sp>
+        <p:nvSpPr>
           <p:cNvPr id="33" name="TextBox 32"/>
           <p:cNvSpPr txBox="1"/>
           <p:nvPr/>
         </p:nvSpPr>
         <p:spPr>
           <a:xfrm>
-            <a:off x="8129016" y="2862071"/>
-            <a:ext cx="3447288" cy="365760"/>
-          </a:xfrm>
-          <a:prstGeom prst="rect">
-            <a:avLst/>
-          </a:prstGeom>
-          <a:noFill/>
-        </p:spPr>
-        <p:txBody>
-          <a:bodyPr wrap="square">
-            <a:spAutoFit/>
-          </a:bodyPr>
-          <a:lstStyle/>
-          <a:p>
-            <a:pPr algn="l"/>
-            <a:r>
-              <a:rPr sz="1000" b="0" i="0">
+            <a:off x="8129016" y="4206239"/>
+            <a:ext cx="3447288" cy="347472"/>
+          </a:xfrm>
+          <a:prstGeom prst="rect">
+            <a:avLst/>
+          </a:prstGeom>
+          <a:noFill/>
+        </p:spPr>
+        <p:txBody>
+          <a:bodyPr wrap="square">
+            <a:spAutoFit/>
+          </a:bodyPr>
+          <a:lstStyle/>
+          <a:p>
+            <a:pPr algn="l"/>
+            <a:r>
+              <a:rPr sz="950" b="0" i="0">
                 <a:solidFill>
                   <a:srgbClr val="E0E6F0"/>
                 </a:solidFill>
               </a:rPr>
-              <a:t>▸  Start: Which document is stale?</a:t>
+              <a:t>▸  Output: version-controlled doc with audit trail.</a:t>
             </a:r>
           </a:p>
         </p:txBody>
@@ -24593,227 +24729,1187 @@
         </p:nvSpPr>
         <p:spPr>
           <a:xfrm>
-            <a:off x="8129016" y="3264407"/>
-            <a:ext cx="3447288" cy="365760"/>
-          </a:xfrm>
-          <a:prstGeom prst="rect">
-            <a:avLst/>
-          </a:prstGeom>
-          <a:noFill/>
-        </p:spPr>
-        <p:txBody>
-          <a:bodyPr wrap="square">
-            <a:spAutoFit/>
-          </a:bodyPr>
-          <a:lstStyle/>
-          <a:p>
-            <a:pPr algn="l"/>
-            <a:r>
-              <a:rPr sz="1000" b="0" i="0">
+            <a:off x="502920" y="4809744"/>
+            <a:ext cx="11183112" cy="256032"/>
+          </a:xfrm>
+          <a:prstGeom prst="rect">
+            <a:avLst/>
+          </a:prstGeom>
+          <a:noFill/>
+        </p:spPr>
+        <p:txBody>
+          <a:bodyPr wrap="square">
+            <a:spAutoFit/>
+          </a:bodyPr>
+          <a:lstStyle/>
+          <a:p>
+            <a:pPr algn="l"/>
+            <a:r>
+              <a:rPr sz="1000" b="1" i="0">
+                <a:solidFill>
+                  <a:srgbClr val="C8A951"/>
+                </a:solidFill>
+              </a:rPr>
+              <a:t>Plus 10 more expert workflows:</a:t>
+            </a:r>
+          </a:p>
+        </p:txBody>
+      </p:sp>
+      <p:sp>
+        <p:nvSpPr>
+          <p:cNvPr id="35" name="Rectangle 34"/>
+          <p:cNvSpPr/>
+          <p:nvPr/>
+        </p:nvSpPr>
+        <p:spPr>
+          <a:xfrm>
+            <a:off x="502920" y="5120640"/>
+            <a:ext cx="2170785" cy="502920"/>
+          </a:xfrm>
+          <a:prstGeom prst="rect">
+            <a:avLst/>
+          </a:prstGeom>
+          <a:solidFill>
+            <a:srgbClr val="1E3A5F"/>
+          </a:solidFill>
+          <a:ln w="12700">
+            <a:solidFill>
+              <a:srgbClr val="1E3A5F"/>
+            </a:solidFill>
+          </a:ln>
+        </p:spPr>
+        <p:style>
+          <a:lnRef idx="1">
+            <a:schemeClr val="accent1"/>
+          </a:lnRef>
+          <a:fillRef idx="3">
+            <a:schemeClr val="accent1"/>
+          </a:fillRef>
+          <a:effectRef idx="2">
+            <a:schemeClr val="accent1"/>
+          </a:effectRef>
+          <a:fontRef idx="minor">
+            <a:schemeClr val="lt1"/>
+          </a:fontRef>
+        </p:style>
+        <p:txBody>
+          <a:bodyPr rtlCol="0" anchor="ctr"/>
+          <a:lstStyle/>
+          <a:p>
+            <a:pPr algn="ctr"/>
+          </a:p>
+        </p:txBody>
+      </p:sp>
+      <p:sp>
+        <p:nvSpPr>
+          <p:cNvPr id="36" name="TextBox 35"/>
+          <p:cNvSpPr txBox="1"/>
+          <p:nvPr/>
+        </p:nvSpPr>
+        <p:spPr>
+          <a:xfrm>
+            <a:off x="576072" y="5157216"/>
+            <a:ext cx="2024481" cy="256032"/>
+          </a:xfrm>
+          <a:prstGeom prst="rect">
+            <a:avLst/>
+          </a:prstGeom>
+          <a:noFill/>
+        </p:spPr>
+        <p:txBody>
+          <a:bodyPr wrap="square">
+            <a:spAutoFit/>
+          </a:bodyPr>
+          <a:lstStyle/>
+          <a:p>
+            <a:pPr algn="l"/>
+            <a:r>
+              <a:rPr sz="900" b="1" i="0">
                 <a:solidFill>
                   <a:srgbClr val="E0E6F0"/>
                 </a:solidFill>
               </a:rPr>
-              <a:t>▸  Staleness detected: dates, deprecated refs.</a:t>
-            </a:r>
-          </a:p>
-        </p:txBody>
-      </p:sp>
-      <p:sp>
-        <p:nvSpPr>
-          <p:cNvPr id="35" name="TextBox 34"/>
-          <p:cNvSpPr txBox="1"/>
-          <p:nvPr/>
-        </p:nvSpPr>
-        <p:spPr>
-          <a:xfrm>
-            <a:off x="8129016" y="3666743"/>
-            <a:ext cx="3447288" cy="365760"/>
-          </a:xfrm>
-          <a:prstGeom prst="rect">
-            <a:avLst/>
-          </a:prstGeom>
-          <a:noFill/>
-        </p:spPr>
-        <p:txBody>
-          <a:bodyPr wrap="square">
-            <a:spAutoFit/>
-          </a:bodyPr>
-          <a:lstStyle/>
-          <a:p>
-            <a:pPr algn="l"/>
-            <a:r>
-              <a:rPr sz="1000" b="0" i="0">
+              <a:t>ATO Package Builder</a:t>
+            </a:r>
+          </a:p>
+        </p:txBody>
+      </p:sp>
+      <p:sp>
+        <p:nvSpPr>
+          <p:cNvPr id="37" name="TextBox 36"/>
+          <p:cNvSpPr txBox="1"/>
+          <p:nvPr/>
+        </p:nvSpPr>
+        <p:spPr>
+          <a:xfrm>
+            <a:off x="576072" y="5413248"/>
+            <a:ext cx="2024481" cy="182880"/>
+          </a:xfrm>
+          <a:prstGeom prst="rect">
+            <a:avLst/>
+          </a:prstGeom>
+          <a:noFill/>
+        </p:spPr>
+        <p:txBody>
+          <a:bodyPr wrap="square">
+            <a:spAutoFit/>
+          </a:bodyPr>
+          <a:lstStyle/>
+          <a:p>
+            <a:pPr algn="l"/>
+            <a:r>
+              <a:rPr sz="800" b="0" i="1">
+                <a:solidFill>
+                  <a:srgbClr val="C8A951"/>
+                </a:solidFill>
+              </a:rPr>
+              <a:t>15 reqs</a:t>
+            </a:r>
+          </a:p>
+        </p:txBody>
+      </p:sp>
+      <p:sp>
+        <p:nvSpPr>
+          <p:cNvPr id="38" name="Rectangle 37"/>
+          <p:cNvSpPr/>
+          <p:nvPr/>
+        </p:nvSpPr>
+        <p:spPr>
+          <a:xfrm>
+            <a:off x="2756001" y="5120640"/>
+            <a:ext cx="2170785" cy="502920"/>
+          </a:xfrm>
+          <a:prstGeom prst="rect">
+            <a:avLst/>
+          </a:prstGeom>
+          <a:solidFill>
+            <a:srgbClr val="1E3A5F"/>
+          </a:solidFill>
+          <a:ln w="12700">
+            <a:solidFill>
+              <a:srgbClr val="1E3A5F"/>
+            </a:solidFill>
+          </a:ln>
+        </p:spPr>
+        <p:style>
+          <a:lnRef idx="1">
+            <a:schemeClr val="accent1"/>
+          </a:lnRef>
+          <a:fillRef idx="3">
+            <a:schemeClr val="accent1"/>
+          </a:fillRef>
+          <a:effectRef idx="2">
+            <a:schemeClr val="accent1"/>
+          </a:effectRef>
+          <a:fontRef idx="minor">
+            <a:schemeClr val="lt1"/>
+          </a:fontRef>
+        </p:style>
+        <p:txBody>
+          <a:bodyPr rtlCol="0" anchor="ctr"/>
+          <a:lstStyle/>
+          <a:p>
+            <a:pPr algn="ctr"/>
+          </a:p>
+        </p:txBody>
+      </p:sp>
+      <p:sp>
+        <p:nvSpPr>
+          <p:cNvPr id="39" name="TextBox 38"/>
+          <p:cNvSpPr txBox="1"/>
+          <p:nvPr/>
+        </p:nvSpPr>
+        <p:spPr>
+          <a:xfrm>
+            <a:off x="2829153" y="5157216"/>
+            <a:ext cx="2024481" cy="256032"/>
+          </a:xfrm>
+          <a:prstGeom prst="rect">
+            <a:avLst/>
+          </a:prstGeom>
+          <a:noFill/>
+        </p:spPr>
+        <p:txBody>
+          <a:bodyPr wrap="square">
+            <a:spAutoFit/>
+          </a:bodyPr>
+          <a:lstStyle/>
+          <a:p>
+            <a:pPr algn="l"/>
+            <a:r>
+              <a:rPr sz="900" b="1" i="0">
                 <a:solidFill>
                   <a:srgbClr val="E0E6F0"/>
                 </a:solidFill>
               </a:rPr>
-              <a:t>▸  Role-weighted crowd voting on edits.</a:t>
-            </a:r>
-          </a:p>
-        </p:txBody>
-      </p:sp>
-      <p:sp>
-        <p:nvSpPr>
-          <p:cNvPr id="36" name="TextBox 35"/>
-          <p:cNvSpPr txBox="1"/>
-          <p:nvPr/>
-        </p:nvSpPr>
-        <p:spPr>
-          <a:xfrm>
-            <a:off x="8129016" y="4069079"/>
-            <a:ext cx="3447288" cy="365760"/>
-          </a:xfrm>
-          <a:prstGeom prst="rect">
-            <a:avLst/>
-          </a:prstGeom>
-          <a:noFill/>
-        </p:spPr>
-        <p:txBody>
-          <a:bodyPr wrap="square">
-            <a:spAutoFit/>
-          </a:bodyPr>
-          <a:lstStyle/>
-          <a:p>
-            <a:pPr algn="l"/>
-            <a:r>
-              <a:rPr sz="1000" b="0" i="0">
+              <a:t>CDRL Generator</a:t>
+            </a:r>
+          </a:p>
+        </p:txBody>
+      </p:sp>
+      <p:sp>
+        <p:nvSpPr>
+          <p:cNvPr id="40" name="TextBox 39"/>
+          <p:cNvSpPr txBox="1"/>
+          <p:nvPr/>
+        </p:nvSpPr>
+        <p:spPr>
+          <a:xfrm>
+            <a:off x="2829153" y="5413248"/>
+            <a:ext cx="2024481" cy="182880"/>
+          </a:xfrm>
+          <a:prstGeom prst="rect">
+            <a:avLst/>
+          </a:prstGeom>
+          <a:noFill/>
+        </p:spPr>
+        <p:txBody>
+          <a:bodyPr wrap="square">
+            <a:spAutoFit/>
+          </a:bodyPr>
+          <a:lstStyle/>
+          <a:p>
+            <a:pPr algn="l"/>
+            <a:r>
+              <a:rPr sz="800" b="0" i="1">
+                <a:solidFill>
+                  <a:srgbClr val="C8A951"/>
+                </a:solidFill>
+              </a:rPr>
+              <a:t>12 reqs</a:t>
+            </a:r>
+          </a:p>
+        </p:txBody>
+      </p:sp>
+      <p:sp>
+        <p:nvSpPr>
+          <p:cNvPr id="41" name="Rectangle 40"/>
+          <p:cNvSpPr/>
+          <p:nvPr/>
+        </p:nvSpPr>
+        <p:spPr>
+          <a:xfrm>
+            <a:off x="5009083" y="5120640"/>
+            <a:ext cx="2170785" cy="502920"/>
+          </a:xfrm>
+          <a:prstGeom prst="rect">
+            <a:avLst/>
+          </a:prstGeom>
+          <a:solidFill>
+            <a:srgbClr val="1E3A5F"/>
+          </a:solidFill>
+          <a:ln w="12700">
+            <a:solidFill>
+              <a:srgbClr val="1E3A5F"/>
+            </a:solidFill>
+          </a:ln>
+        </p:spPr>
+        <p:style>
+          <a:lnRef idx="1">
+            <a:schemeClr val="accent1"/>
+          </a:lnRef>
+          <a:fillRef idx="3">
+            <a:schemeClr val="accent1"/>
+          </a:fillRef>
+          <a:effectRef idx="2">
+            <a:schemeClr val="accent1"/>
+          </a:effectRef>
+          <a:fontRef idx="minor">
+            <a:schemeClr val="lt1"/>
+          </a:fontRef>
+        </p:style>
+        <p:txBody>
+          <a:bodyPr rtlCol="0" anchor="ctr"/>
+          <a:lstStyle/>
+          <a:p>
+            <a:pPr algn="ctr"/>
+          </a:p>
+        </p:txBody>
+      </p:sp>
+      <p:sp>
+        <p:nvSpPr>
+          <p:cNvPr id="42" name="TextBox 41"/>
+          <p:cNvSpPr txBox="1"/>
+          <p:nvPr/>
+        </p:nvSpPr>
+        <p:spPr>
+          <a:xfrm>
+            <a:off x="5082235" y="5157216"/>
+            <a:ext cx="2024481" cy="256032"/>
+          </a:xfrm>
+          <a:prstGeom prst="rect">
+            <a:avLst/>
+          </a:prstGeom>
+          <a:noFill/>
+        </p:spPr>
+        <p:txBody>
+          <a:bodyPr wrap="square">
+            <a:spAutoFit/>
+          </a:bodyPr>
+          <a:lstStyle/>
+          <a:p>
+            <a:pPr algn="l"/>
+            <a:r>
+              <a:rPr sz="900" b="1" i="0">
                 <a:solidFill>
                   <a:srgbClr val="E0E6F0"/>
                 </a:solidFill>
               </a:rPr>
-              <a:t>▸  AI rebuilds approved sections.</a:t>
-            </a:r>
-          </a:p>
-        </p:txBody>
-      </p:sp>
-      <p:sp>
-        <p:nvSpPr>
-          <p:cNvPr id="37" name="TextBox 36"/>
-          <p:cNvSpPr txBox="1"/>
-          <p:nvPr/>
-        </p:nvSpPr>
-        <p:spPr>
-          <a:xfrm>
-            <a:off x="8129016" y="4471415"/>
-            <a:ext cx="3447288" cy="365760"/>
-          </a:xfrm>
-          <a:prstGeom prst="rect">
-            <a:avLst/>
-          </a:prstGeom>
-          <a:noFill/>
-        </p:spPr>
-        <p:txBody>
-          <a:bodyPr wrap="square">
-            <a:spAutoFit/>
-          </a:bodyPr>
-          <a:lstStyle/>
-          <a:p>
-            <a:pPr algn="l"/>
-            <a:r>
-              <a:rPr sz="1000" b="0" i="0">
+              <a:t>Incident Response Plan</a:t>
+            </a:r>
+          </a:p>
+        </p:txBody>
+      </p:sp>
+      <p:sp>
+        <p:nvSpPr>
+          <p:cNvPr id="43" name="TextBox 42"/>
+          <p:cNvSpPr txBox="1"/>
+          <p:nvPr/>
+        </p:nvSpPr>
+        <p:spPr>
+          <a:xfrm>
+            <a:off x="5082235" y="5413248"/>
+            <a:ext cx="2024481" cy="182880"/>
+          </a:xfrm>
+          <a:prstGeom prst="rect">
+            <a:avLst/>
+          </a:prstGeom>
+          <a:noFill/>
+        </p:spPr>
+        <p:txBody>
+          <a:bodyPr wrap="square">
+            <a:spAutoFit/>
+          </a:bodyPr>
+          <a:lstStyle/>
+          <a:p>
+            <a:pPr algn="l"/>
+            <a:r>
+              <a:rPr sz="800" b="0" i="1">
+                <a:solidFill>
+                  <a:srgbClr val="C8A951"/>
+                </a:solidFill>
+              </a:rPr>
+              <a:t>10 reqs</a:t>
+            </a:r>
+          </a:p>
+        </p:txBody>
+      </p:sp>
+      <p:sp>
+        <p:nvSpPr>
+          <p:cNvPr id="44" name="Rectangle 43"/>
+          <p:cNvSpPr/>
+          <p:nvPr/>
+        </p:nvSpPr>
+        <p:spPr>
+          <a:xfrm>
+            <a:off x="7262164" y="5120640"/>
+            <a:ext cx="2170785" cy="502920"/>
+          </a:xfrm>
+          <a:prstGeom prst="rect">
+            <a:avLst/>
+          </a:prstGeom>
+          <a:solidFill>
+            <a:srgbClr val="1E3A5F"/>
+          </a:solidFill>
+          <a:ln w="12700">
+            <a:solidFill>
+              <a:srgbClr val="1E3A5F"/>
+            </a:solidFill>
+          </a:ln>
+        </p:spPr>
+        <p:style>
+          <a:lnRef idx="1">
+            <a:schemeClr val="accent1"/>
+          </a:lnRef>
+          <a:fillRef idx="3">
+            <a:schemeClr val="accent1"/>
+          </a:fillRef>
+          <a:effectRef idx="2">
+            <a:schemeClr val="accent1"/>
+          </a:effectRef>
+          <a:fontRef idx="minor">
+            <a:schemeClr val="lt1"/>
+          </a:fontRef>
+        </p:style>
+        <p:txBody>
+          <a:bodyPr rtlCol="0" anchor="ctr"/>
+          <a:lstStyle/>
+          <a:p>
+            <a:pPr algn="ctr"/>
+          </a:p>
+        </p:txBody>
+      </p:sp>
+      <p:sp>
+        <p:nvSpPr>
+          <p:cNvPr id="45" name="TextBox 44"/>
+          <p:cNvSpPr txBox="1"/>
+          <p:nvPr/>
+        </p:nvSpPr>
+        <p:spPr>
+          <a:xfrm>
+            <a:off x="7335316" y="5157216"/>
+            <a:ext cx="2024481" cy="256032"/>
+          </a:xfrm>
+          <a:prstGeom prst="rect">
+            <a:avLst/>
+          </a:prstGeom>
+          <a:noFill/>
+        </p:spPr>
+        <p:txBody>
+          <a:bodyPr wrap="square">
+            <a:spAutoFit/>
+          </a:bodyPr>
+          <a:lstStyle/>
+          <a:p>
+            <a:pPr algn="l"/>
+            <a:r>
+              <a:rPr sz="900" b="1" i="0">
                 <a:solidFill>
                   <a:srgbClr val="E0E6F0"/>
                 </a:solidFill>
               </a:rPr>
-              <a:t>▸  Auto-indexed to Knowledge Graph in &lt;24 hrs.</a:t>
-            </a:r>
-          </a:p>
-        </p:txBody>
-      </p:sp>
-      <p:sp>
-        <p:nvSpPr>
-          <p:cNvPr id="38" name="TextBox 37"/>
-          <p:cNvSpPr txBox="1"/>
-          <p:nvPr/>
-        </p:nvSpPr>
-        <p:spPr>
-          <a:xfrm>
-            <a:off x="8129016" y="4873751"/>
-            <a:ext cx="3447288" cy="365760"/>
-          </a:xfrm>
-          <a:prstGeom prst="rect">
-            <a:avLst/>
-          </a:prstGeom>
-          <a:noFill/>
-        </p:spPr>
-        <p:txBody>
-          <a:bodyPr wrap="square">
-            <a:spAutoFit/>
-          </a:bodyPr>
-          <a:lstStyle/>
-          <a:p>
-            <a:pPr algn="l"/>
-            <a:r>
-              <a:rPr sz="1000" b="0" i="0">
+              <a:t>Program Status Review</a:t>
+            </a:r>
+          </a:p>
+        </p:txBody>
+      </p:sp>
+      <p:sp>
+        <p:nvSpPr>
+          <p:cNvPr id="46" name="TextBox 45"/>
+          <p:cNvSpPr txBox="1"/>
+          <p:nvPr/>
+        </p:nvSpPr>
+        <p:spPr>
+          <a:xfrm>
+            <a:off x="7335316" y="5413248"/>
+            <a:ext cx="2024481" cy="182880"/>
+          </a:xfrm>
+          <a:prstGeom prst="rect">
+            <a:avLst/>
+          </a:prstGeom>
+          <a:noFill/>
+        </p:spPr>
+        <p:txBody>
+          <a:bodyPr wrap="square">
+            <a:spAutoFit/>
+          </a:bodyPr>
+          <a:lstStyle/>
+          <a:p>
+            <a:pPr algn="l"/>
+            <a:r>
+              <a:rPr sz="800" b="0" i="1">
+                <a:solidFill>
+                  <a:srgbClr val="C8A951"/>
+                </a:solidFill>
+              </a:rPr>
+              <a:t>8 reqs</a:t>
+            </a:r>
+          </a:p>
+        </p:txBody>
+      </p:sp>
+      <p:sp>
+        <p:nvSpPr>
+          <p:cNvPr id="47" name="Rectangle 46"/>
+          <p:cNvSpPr/>
+          <p:nvPr/>
+        </p:nvSpPr>
+        <p:spPr>
+          <a:xfrm>
+            <a:off x="9515246" y="5120640"/>
+            <a:ext cx="2170785" cy="502920"/>
+          </a:xfrm>
+          <a:prstGeom prst="rect">
+            <a:avLst/>
+          </a:prstGeom>
+          <a:solidFill>
+            <a:srgbClr val="1E3A5F"/>
+          </a:solidFill>
+          <a:ln w="12700">
+            <a:solidFill>
+              <a:srgbClr val="1E3A5F"/>
+            </a:solidFill>
+          </a:ln>
+        </p:spPr>
+        <p:style>
+          <a:lnRef idx="1">
+            <a:schemeClr val="accent1"/>
+          </a:lnRef>
+          <a:fillRef idx="3">
+            <a:schemeClr val="accent1"/>
+          </a:fillRef>
+          <a:effectRef idx="2">
+            <a:schemeClr val="accent1"/>
+          </a:effectRef>
+          <a:fontRef idx="minor">
+            <a:schemeClr val="lt1"/>
+          </a:fontRef>
+        </p:style>
+        <p:txBody>
+          <a:bodyPr rtlCol="0" anchor="ctr"/>
+          <a:lstStyle/>
+          <a:p>
+            <a:pPr algn="ctr"/>
+          </a:p>
+        </p:txBody>
+      </p:sp>
+      <p:sp>
+        <p:nvSpPr>
+          <p:cNvPr id="48" name="TextBox 47"/>
+          <p:cNvSpPr txBox="1"/>
+          <p:nvPr/>
+        </p:nvSpPr>
+        <p:spPr>
+          <a:xfrm>
+            <a:off x="9588398" y="5157216"/>
+            <a:ext cx="2024481" cy="256032"/>
+          </a:xfrm>
+          <a:prstGeom prst="rect">
+            <a:avLst/>
+          </a:prstGeom>
+          <a:noFill/>
+        </p:spPr>
+        <p:txBody>
+          <a:bodyPr wrap="square">
+            <a:spAutoFit/>
+          </a:bodyPr>
+          <a:lstStyle/>
+          <a:p>
+            <a:pPr algn="l"/>
+            <a:r>
+              <a:rPr sz="900" b="1" i="0">
                 <a:solidFill>
                   <a:srgbClr val="E0E6F0"/>
                 </a:solidFill>
               </a:rPr>
-              <a:t>▸  Output: version-controlled document with</a:t>
-            </a:r>
-          </a:p>
-        </p:txBody>
-      </p:sp>
-      <p:sp>
-        <p:nvSpPr>
-          <p:cNvPr id="39" name="TextBox 38"/>
-          <p:cNvSpPr txBox="1"/>
-          <p:nvPr/>
-        </p:nvSpPr>
-        <p:spPr>
-          <a:xfrm>
-            <a:off x="8129016" y="5276087"/>
-            <a:ext cx="3447288" cy="365760"/>
-          </a:xfrm>
-          <a:prstGeom prst="rect">
-            <a:avLst/>
-          </a:prstGeom>
-          <a:noFill/>
-        </p:spPr>
-        <p:txBody>
-          <a:bodyPr wrap="square">
-            <a:spAutoFit/>
-          </a:bodyPr>
-          <a:lstStyle/>
-          <a:p>
-            <a:pPr algn="l"/>
-            <a:r>
-              <a:rPr sz="1000" b="0" i="0">
+              <a:t>SBOM Attestation</a:t>
+            </a:r>
+          </a:p>
+        </p:txBody>
+      </p:sp>
+      <p:sp>
+        <p:nvSpPr>
+          <p:cNvPr id="49" name="TextBox 48"/>
+          <p:cNvSpPr txBox="1"/>
+          <p:nvPr/>
+        </p:nvSpPr>
+        <p:spPr>
+          <a:xfrm>
+            <a:off x="9588398" y="5413248"/>
+            <a:ext cx="2024481" cy="182880"/>
+          </a:xfrm>
+          <a:prstGeom prst="rect">
+            <a:avLst/>
+          </a:prstGeom>
+          <a:noFill/>
+        </p:spPr>
+        <p:txBody>
+          <a:bodyPr wrap="square">
+            <a:spAutoFit/>
+          </a:bodyPr>
+          <a:lstStyle/>
+          <a:p>
+            <a:pPr algn="l"/>
+            <a:r>
+              <a:rPr sz="800" b="0" i="1">
+                <a:solidFill>
+                  <a:srgbClr val="C8A951"/>
+                </a:solidFill>
+              </a:rPr>
+              <a:t>10 reqs</a:t>
+            </a:r>
+          </a:p>
+        </p:txBody>
+      </p:sp>
+      <p:sp>
+        <p:nvSpPr>
+          <p:cNvPr id="50" name="Rectangle 49"/>
+          <p:cNvSpPr/>
+          <p:nvPr/>
+        </p:nvSpPr>
+        <p:spPr>
+          <a:xfrm>
+            <a:off x="502920" y="5687568"/>
+            <a:ext cx="2170785" cy="502920"/>
+          </a:xfrm>
+          <a:prstGeom prst="rect">
+            <a:avLst/>
+          </a:prstGeom>
+          <a:solidFill>
+            <a:srgbClr val="1E3A5F"/>
+          </a:solidFill>
+          <a:ln w="12700">
+            <a:solidFill>
+              <a:srgbClr val="1E3A5F"/>
+            </a:solidFill>
+          </a:ln>
+        </p:spPr>
+        <p:style>
+          <a:lnRef idx="1">
+            <a:schemeClr val="accent1"/>
+          </a:lnRef>
+          <a:fillRef idx="3">
+            <a:schemeClr val="accent1"/>
+          </a:fillRef>
+          <a:effectRef idx="2">
+            <a:schemeClr val="accent1"/>
+          </a:effectRef>
+          <a:fontRef idx="minor">
+            <a:schemeClr val="lt1"/>
+          </a:fontRef>
+        </p:style>
+        <p:txBody>
+          <a:bodyPr rtlCol="0" anchor="ctr"/>
+          <a:lstStyle/>
+          <a:p>
+            <a:pPr algn="ctr"/>
+          </a:p>
+        </p:txBody>
+      </p:sp>
+      <p:sp>
+        <p:nvSpPr>
+          <p:cNvPr id="51" name="TextBox 50"/>
+          <p:cNvSpPr txBox="1"/>
+          <p:nvPr/>
+        </p:nvSpPr>
+        <p:spPr>
+          <a:xfrm>
+            <a:off x="576072" y="5724144"/>
+            <a:ext cx="2024481" cy="256032"/>
+          </a:xfrm>
+          <a:prstGeom prst="rect">
+            <a:avLst/>
+          </a:prstGeom>
+          <a:noFill/>
+        </p:spPr>
+        <p:txBody>
+          <a:bodyPr wrap="square">
+            <a:spAutoFit/>
+          </a:bodyPr>
+          <a:lstStyle/>
+          <a:p>
+            <a:pPr algn="l"/>
+            <a:r>
+              <a:rPr sz="900" b="1" i="0">
                 <a:solidFill>
                   <a:srgbClr val="E0E6F0"/>
                 </a:solidFill>
               </a:rPr>
-              <a:t>▸    diff view and full audit trail.</a:t>
-            </a:r>
-          </a:p>
-        </p:txBody>
-      </p:sp>
-      <p:sp>
-        <p:nvSpPr>
-          <p:cNvPr id="40" name="TextBox 39"/>
-          <p:cNvSpPr txBox="1"/>
-          <p:nvPr/>
-        </p:nvSpPr>
-        <p:spPr>
-          <a:xfrm>
-            <a:off x="502920" y="6291072"/>
-            <a:ext cx="11183112" cy="256032"/>
-          </a:xfrm>
-          <a:prstGeom prst="rect">
-            <a:avLst/>
-          </a:prstGeom>
-          <a:noFill/>
-        </p:spPr>
-        <p:txBody>
-          <a:bodyPr wrap="square">
-            <a:spAutoFit/>
-          </a:bodyPr>
-          <a:lstStyle/>
-          <a:p>
-            <a:pPr algn="ctr"/>
-            <a:r>
-              <a:rPr sz="1000" b="0" i="1">
+              <a:t>FedRAMP Auth Prep</a:t>
+            </a:r>
+          </a:p>
+        </p:txBody>
+      </p:sp>
+      <p:sp>
+        <p:nvSpPr>
+          <p:cNvPr id="52" name="TextBox 51"/>
+          <p:cNvSpPr txBox="1"/>
+          <p:nvPr/>
+        </p:nvSpPr>
+        <p:spPr>
+          <a:xfrm>
+            <a:off x="576072" y="5980176"/>
+            <a:ext cx="2024481" cy="182880"/>
+          </a:xfrm>
+          <a:prstGeom prst="rect">
+            <a:avLst/>
+          </a:prstGeom>
+          <a:noFill/>
+        </p:spPr>
+        <p:txBody>
+          <a:bodyPr wrap="square">
+            <a:spAutoFit/>
+          </a:bodyPr>
+          <a:lstStyle/>
+          <a:p>
+            <a:pPr algn="l"/>
+            <a:r>
+              <a:rPr sz="800" b="0" i="1">
+                <a:solidFill>
+                  <a:srgbClr val="C8A951"/>
+                </a:solidFill>
+              </a:rPr>
+              <a:t>15 reqs</a:t>
+            </a:r>
+          </a:p>
+        </p:txBody>
+      </p:sp>
+      <p:sp>
+        <p:nvSpPr>
+          <p:cNvPr id="53" name="Rectangle 52"/>
+          <p:cNvSpPr/>
+          <p:nvPr/>
+        </p:nvSpPr>
+        <p:spPr>
+          <a:xfrm>
+            <a:off x="2756001" y="5687568"/>
+            <a:ext cx="2170785" cy="502920"/>
+          </a:xfrm>
+          <a:prstGeom prst="rect">
+            <a:avLst/>
+          </a:prstGeom>
+          <a:solidFill>
+            <a:srgbClr val="1E3A5F"/>
+          </a:solidFill>
+          <a:ln w="12700">
+            <a:solidFill>
+              <a:srgbClr val="1E3A5F"/>
+            </a:solidFill>
+          </a:ln>
+        </p:spPr>
+        <p:style>
+          <a:lnRef idx="1">
+            <a:schemeClr val="accent1"/>
+          </a:lnRef>
+          <a:fillRef idx="3">
+            <a:schemeClr val="accent1"/>
+          </a:fillRef>
+          <a:effectRef idx="2">
+            <a:schemeClr val="accent1"/>
+          </a:effectRef>
+          <a:fontRef idx="minor">
+            <a:schemeClr val="lt1"/>
+          </a:fontRef>
+        </p:style>
+        <p:txBody>
+          <a:bodyPr rtlCol="0" anchor="ctr"/>
+          <a:lstStyle/>
+          <a:p>
+            <a:pPr algn="ctr"/>
+          </a:p>
+        </p:txBody>
+      </p:sp>
+      <p:sp>
+        <p:nvSpPr>
+          <p:cNvPr id="54" name="TextBox 53"/>
+          <p:cNvSpPr txBox="1"/>
+          <p:nvPr/>
+        </p:nvSpPr>
+        <p:spPr>
+          <a:xfrm>
+            <a:off x="2829153" y="5724144"/>
+            <a:ext cx="2024481" cy="256032"/>
+          </a:xfrm>
+          <a:prstGeom prst="rect">
+            <a:avLst/>
+          </a:prstGeom>
+          <a:noFill/>
+        </p:spPr>
+        <p:txBody>
+          <a:bodyPr wrap="square">
+            <a:spAutoFit/>
+          </a:bodyPr>
+          <a:lstStyle/>
+          <a:p>
+            <a:pPr algn="l"/>
+            <a:r>
+              <a:rPr sz="900" b="1" i="0">
+                <a:solidFill>
+                  <a:srgbClr val="E0E6F0"/>
+                </a:solidFill>
+              </a:rPr>
+              <a:t>Privacy Impact Assessment</a:t>
+            </a:r>
+          </a:p>
+        </p:txBody>
+      </p:sp>
+      <p:sp>
+        <p:nvSpPr>
+          <p:cNvPr id="55" name="TextBox 54"/>
+          <p:cNvSpPr txBox="1"/>
+          <p:nvPr/>
+        </p:nvSpPr>
+        <p:spPr>
+          <a:xfrm>
+            <a:off x="2829153" y="5980176"/>
+            <a:ext cx="2024481" cy="182880"/>
+          </a:xfrm>
+          <a:prstGeom prst="rect">
+            <a:avLst/>
+          </a:prstGeom>
+          <a:noFill/>
+        </p:spPr>
+        <p:txBody>
+          <a:bodyPr wrap="square">
+            <a:spAutoFit/>
+          </a:bodyPr>
+          <a:lstStyle/>
+          <a:p>
+            <a:pPr algn="l"/>
+            <a:r>
+              <a:rPr sz="800" b="0" i="1">
+                <a:solidFill>
+                  <a:srgbClr val="C8A951"/>
+                </a:solidFill>
+              </a:rPr>
+              <a:t>10 reqs</a:t>
+            </a:r>
+          </a:p>
+        </p:txBody>
+      </p:sp>
+      <p:sp>
+        <p:nvSpPr>
+          <p:cNvPr id="56" name="Rectangle 55"/>
+          <p:cNvSpPr/>
+          <p:nvPr/>
+        </p:nvSpPr>
+        <p:spPr>
+          <a:xfrm>
+            <a:off x="5009083" y="5687568"/>
+            <a:ext cx="2170785" cy="502920"/>
+          </a:xfrm>
+          <a:prstGeom prst="rect">
+            <a:avLst/>
+          </a:prstGeom>
+          <a:solidFill>
+            <a:srgbClr val="1E3A5F"/>
+          </a:solidFill>
+          <a:ln w="12700">
+            <a:solidFill>
+              <a:srgbClr val="1E3A5F"/>
+            </a:solidFill>
+          </a:ln>
+        </p:spPr>
+        <p:style>
+          <a:lnRef idx="1">
+            <a:schemeClr val="accent1"/>
+          </a:lnRef>
+          <a:fillRef idx="3">
+            <a:schemeClr val="accent1"/>
+          </a:fillRef>
+          <a:effectRef idx="2">
+            <a:schemeClr val="accent1"/>
+          </a:effectRef>
+          <a:fontRef idx="minor">
+            <a:schemeClr val="lt1"/>
+          </a:fontRef>
+        </p:style>
+        <p:txBody>
+          <a:bodyPr rtlCol="0" anchor="ctr"/>
+          <a:lstStyle/>
+          <a:p>
+            <a:pPr algn="ctr"/>
+          </a:p>
+        </p:txBody>
+      </p:sp>
+      <p:sp>
+        <p:nvSpPr>
+          <p:cNvPr id="57" name="TextBox 56"/>
+          <p:cNvSpPr txBox="1"/>
+          <p:nvPr/>
+        </p:nvSpPr>
+        <p:spPr>
+          <a:xfrm>
+            <a:off x="5082235" y="5724144"/>
+            <a:ext cx="2024481" cy="256032"/>
+          </a:xfrm>
+          <a:prstGeom prst="rect">
+            <a:avLst/>
+          </a:prstGeom>
+          <a:noFill/>
+        </p:spPr>
+        <p:txBody>
+          <a:bodyPr wrap="square">
+            <a:spAutoFit/>
+          </a:bodyPr>
+          <a:lstStyle/>
+          <a:p>
+            <a:pPr algn="l"/>
+            <a:r>
+              <a:rPr sz="900" b="1" i="0">
+                <a:solidFill>
+                  <a:srgbClr val="E0E6F0"/>
+                </a:solidFill>
+              </a:rPr>
+              <a:t>Section 508 Audit</a:t>
+            </a:r>
+          </a:p>
+        </p:txBody>
+      </p:sp>
+      <p:sp>
+        <p:nvSpPr>
+          <p:cNvPr id="58" name="TextBox 57"/>
+          <p:cNvSpPr txBox="1"/>
+          <p:nvPr/>
+        </p:nvSpPr>
+        <p:spPr>
+          <a:xfrm>
+            <a:off x="5082235" y="5980176"/>
+            <a:ext cx="2024481" cy="182880"/>
+          </a:xfrm>
+          <a:prstGeom prst="rect">
+            <a:avLst/>
+          </a:prstGeom>
+          <a:noFill/>
+        </p:spPr>
+        <p:txBody>
+          <a:bodyPr wrap="square">
+            <a:spAutoFit/>
+          </a:bodyPr>
+          <a:lstStyle/>
+          <a:p>
+            <a:pPr algn="l"/>
+            <a:r>
+              <a:rPr sz="800" b="0" i="1">
+                <a:solidFill>
+                  <a:srgbClr val="C8A951"/>
+                </a:solidFill>
+              </a:rPr>
+              <a:t>8 reqs</a:t>
+            </a:r>
+          </a:p>
+        </p:txBody>
+      </p:sp>
+      <p:sp>
+        <p:nvSpPr>
+          <p:cNvPr id="59" name="Rectangle 58"/>
+          <p:cNvSpPr/>
+          <p:nvPr/>
+        </p:nvSpPr>
+        <p:spPr>
+          <a:xfrm>
+            <a:off x="7262164" y="5687568"/>
+            <a:ext cx="2170785" cy="502920"/>
+          </a:xfrm>
+          <a:prstGeom prst="rect">
+            <a:avLst/>
+          </a:prstGeom>
+          <a:solidFill>
+            <a:srgbClr val="1E3A5F"/>
+          </a:solidFill>
+          <a:ln w="12700">
+            <a:solidFill>
+              <a:srgbClr val="1E3A5F"/>
+            </a:solidFill>
+          </a:ln>
+        </p:spPr>
+        <p:style>
+          <a:lnRef idx="1">
+            <a:schemeClr val="accent1"/>
+          </a:lnRef>
+          <a:fillRef idx="3">
+            <a:schemeClr val="accent1"/>
+          </a:fillRef>
+          <a:effectRef idx="2">
+            <a:schemeClr val="accent1"/>
+          </a:effectRef>
+          <a:fontRef idx="minor">
+            <a:schemeClr val="lt1"/>
+          </a:fontRef>
+        </p:style>
+        <p:txBody>
+          <a:bodyPr rtlCol="0" anchor="ctr"/>
+          <a:lstStyle/>
+          <a:p>
+            <a:pPr algn="ctr"/>
+          </a:p>
+        </p:txBody>
+      </p:sp>
+      <p:sp>
+        <p:nvSpPr>
+          <p:cNvPr id="60" name="TextBox 59"/>
+          <p:cNvSpPr txBox="1"/>
+          <p:nvPr/>
+        </p:nvSpPr>
+        <p:spPr>
+          <a:xfrm>
+            <a:off x="7335316" y="5724144"/>
+            <a:ext cx="2024481" cy="256032"/>
+          </a:xfrm>
+          <a:prstGeom prst="rect">
+            <a:avLst/>
+          </a:prstGeom>
+          <a:noFill/>
+        </p:spPr>
+        <p:txBody>
+          <a:bodyPr wrap="square">
+            <a:spAutoFit/>
+          </a:bodyPr>
+          <a:lstStyle/>
+          <a:p>
+            <a:pPr algn="l"/>
+            <a:r>
+              <a:rPr sz="900" b="1" i="0">
+                <a:solidFill>
+                  <a:srgbClr val="E0E6F0"/>
+                </a:solidFill>
+              </a:rPr>
+              <a:t>Grant Tech Proposal</a:t>
+            </a:r>
+          </a:p>
+        </p:txBody>
+      </p:sp>
+      <p:sp>
+        <p:nvSpPr>
+          <p:cNvPr id="61" name="TextBox 60"/>
+          <p:cNvSpPr txBox="1"/>
+          <p:nvPr/>
+        </p:nvSpPr>
+        <p:spPr>
+          <a:xfrm>
+            <a:off x="7335316" y="5980176"/>
+            <a:ext cx="2024481" cy="182880"/>
+          </a:xfrm>
+          <a:prstGeom prst="rect">
+            <a:avLst/>
+          </a:prstGeom>
+          <a:noFill/>
+        </p:spPr>
+        <p:txBody>
+          <a:bodyPr wrap="square">
+            <a:spAutoFit/>
+          </a:bodyPr>
+          <a:lstStyle/>
+          <a:p>
+            <a:pPr algn="l"/>
+            <a:r>
+              <a:rPr sz="800" b="0" i="1">
+                <a:solidFill>
+                  <a:srgbClr val="C8A951"/>
+                </a:solidFill>
+              </a:rPr>
+              <a:t>10 reqs</a:t>
+            </a:r>
+          </a:p>
+        </p:txBody>
+      </p:sp>
+      <p:sp>
+        <p:nvSpPr>
+          <p:cNvPr id="62" name="Rectangle 61"/>
+          <p:cNvSpPr/>
+          <p:nvPr/>
+        </p:nvSpPr>
+        <p:spPr>
+          <a:xfrm>
+            <a:off x="9515246" y="5687568"/>
+            <a:ext cx="2170785" cy="502920"/>
+          </a:xfrm>
+          <a:prstGeom prst="rect">
+            <a:avLst/>
+          </a:prstGeom>
+          <a:solidFill>
+            <a:srgbClr val="1E3A5F"/>
+          </a:solidFill>
+          <a:ln w="12700">
+            <a:solidFill>
+              <a:srgbClr val="1E3A5F"/>
+            </a:solidFill>
+          </a:ln>
+        </p:spPr>
+        <p:style>
+          <a:lnRef idx="1">
+            <a:schemeClr val="accent1"/>
+          </a:lnRef>
+          <a:fillRef idx="3">
+            <a:schemeClr val="accent1"/>
+          </a:fillRef>
+          <a:effectRef idx="2">
+            <a:schemeClr val="accent1"/>
+          </a:effectRef>
+          <a:fontRef idx="minor">
+            <a:schemeClr val="lt1"/>
+          </a:fontRef>
+        </p:style>
+        <p:txBody>
+          <a:bodyPr rtlCol="0" anchor="ctr"/>
+          <a:lstStyle/>
+          <a:p>
+            <a:pPr algn="ctr"/>
+          </a:p>
+        </p:txBody>
+      </p:sp>
+      <p:sp>
+        <p:nvSpPr>
+          <p:cNvPr id="63" name="TextBox 62"/>
+          <p:cNvSpPr txBox="1"/>
+          <p:nvPr/>
+        </p:nvSpPr>
+        <p:spPr>
+          <a:xfrm>
+            <a:off x="9588398" y="5724144"/>
+            <a:ext cx="2024481" cy="256032"/>
+          </a:xfrm>
+          <a:prstGeom prst="rect">
+            <a:avLst/>
+          </a:prstGeom>
+          <a:noFill/>
+        </p:spPr>
+        <p:txBody>
+          <a:bodyPr wrap="square">
+            <a:spAutoFit/>
+          </a:bodyPr>
+          <a:lstStyle/>
+          <a:p>
+            <a:pPr algn="l"/>
+            <a:r>
+              <a:rPr sz="900" b="1" i="0">
+                <a:solidFill>
+                  <a:srgbClr val="E0E6F0"/>
+                </a:solidFill>
+              </a:rPr>
+              <a:t>CJIS Compliance</a:t>
+            </a:r>
+          </a:p>
+        </p:txBody>
+      </p:sp>
+      <p:sp>
+        <p:nvSpPr>
+          <p:cNvPr id="64" name="TextBox 63"/>
+          <p:cNvSpPr txBox="1"/>
+          <p:nvPr/>
+        </p:nvSpPr>
+        <p:spPr>
+          <a:xfrm>
+            <a:off x="9588398" y="5980176"/>
+            <a:ext cx="2024481" cy="182880"/>
+          </a:xfrm>
+          <a:prstGeom prst="rect">
+            <a:avLst/>
+          </a:prstGeom>
+          <a:noFill/>
+        </p:spPr>
+        <p:txBody>
+          <a:bodyPr wrap="square">
+            <a:spAutoFit/>
+          </a:bodyPr>
+          <a:lstStyle/>
+          <a:p>
+            <a:pPr algn="l"/>
+            <a:r>
+              <a:rPr sz="800" b="0" i="1">
+                <a:solidFill>
+                  <a:srgbClr val="C8A951"/>
+                </a:solidFill>
+              </a:rPr>
+              <a:t>12 reqs</a:t>
+            </a:r>
+          </a:p>
+        </p:txBody>
+      </p:sp>
+      <p:sp>
+        <p:nvSpPr>
+          <p:cNvPr id="65" name="TextBox 64"/>
+          <p:cNvSpPr txBox="1"/>
+          <p:nvPr/>
+        </p:nvSpPr>
+        <p:spPr>
+          <a:xfrm>
+            <a:off x="502920" y="6327648"/>
+            <a:ext cx="11183112" cy="219456"/>
+          </a:xfrm>
+          <a:prstGeom prst="rect">
+            <a:avLst/>
+          </a:prstGeom>
+          <a:noFill/>
+        </p:spPr>
+        <p:txBody>
+          <a:bodyPr wrap="square">
+            <a:spAutoFit/>
+          </a:bodyPr>
+          <a:lstStyle/>
+          <a:p>
+            <a:pPr algn="ctr"/>
+            <a:r>
+              <a:rPr sz="900" b="0" i="1">
                 <a:solidFill>
                   <a:srgbClr val="1E3A5F"/>
                 </a:solidFill>

--- a/tools/presentations/output/ICDEV_Executive_Deck.pptx
+++ b/tools/presentations/output/ICDEV_Executive_Deck.pptx
@@ -21,8 +21,8 @@
     <p:sldId id="269" r:id="rId20"/>
     <p:sldId id="270" r:id="rId21"/>
     <p:sldId id="271" r:id="rId22"/>
-    <p:sldId id="272" r:id="rId23"/>
-    <p:sldId id="273" r:id="rId24"/>
+    <p:sldId id="272" r:id="rId24"/>
+    <p:sldId id="273" r:id="rId25"/>
   </p:sldIdLst>
   <p:sldSz cx="12188952" cy="6858000" type="screen4x3"/>
   <p:notesSz cx="6858000" cy="9144000"/>
@@ -122,6 +122,476 @@
     </a:lvl9pPr>
   </p:defaultTextStyle>
 </p:presentation>
+</file>
+
+<file path=ppt/notesMasters/notesMaster1.xml><?xml version="1.0" encoding="utf-8"?>
+<p:notesMaster xmlns:a="http://schemas.openxmlformats.org/drawingml/2006/main" xmlns:p="http://schemas.openxmlformats.org/presentationml/2006/main" xmlns:r="http://schemas.openxmlformats.org/officeDocument/2006/relationships">
+  <p:cSld>
+    <p:bg>
+      <p:bgRef idx="1001">
+        <a:schemeClr val="bg1"/>
+      </p:bgRef>
+    </p:bg>
+    <p:spTree>
+      <p:nvGrpSpPr>
+        <p:cNvPr id="1" name=""/>
+        <p:cNvGrpSpPr/>
+        <p:nvPr/>
+      </p:nvGrpSpPr>
+      <p:grpSpPr>
+        <a:xfrm>
+          <a:off x="0" y="0"/>
+          <a:ext cx="0" cy="0"/>
+          <a:chOff x="0" y="0"/>
+          <a:chExt cx="0" cy="0"/>
+        </a:xfrm>
+      </p:grpSpPr>
+      <p:sp>
+        <p:nvSpPr>
+          <p:cNvPr id="2" name="Header Placeholder 1"/>
+          <p:cNvSpPr>
+            <a:spLocks noGrp="1"/>
+          </p:cNvSpPr>
+          <p:nvPr>
+            <p:ph type="hdr" sz="quarter"/>
+          </p:nvPr>
+        </p:nvSpPr>
+        <p:spPr>
+          <a:xfrm>
+            <a:off x="0" y="0"/>
+            <a:ext cx="2971800" cy="457200"/>
+          </a:xfrm>
+          <a:prstGeom prst="rect">
+            <a:avLst/>
+          </a:prstGeom>
+        </p:spPr>
+        <p:txBody>
+          <a:bodyPr vert="horz" lIns="91440" tIns="45720" rIns="91440" bIns="45720" rtlCol="0"/>
+          <a:lstStyle>
+            <a:lvl1pPr algn="l">
+              <a:defRPr sz="1200"/>
+            </a:lvl1pPr>
+          </a:lstStyle>
+          <a:p>
+            <a:endParaRPr lang="en-US"/>
+          </a:p>
+        </p:txBody>
+      </p:sp>
+      <p:sp>
+        <p:nvSpPr>
+          <p:cNvPr id="3" name="Date Placeholder 2"/>
+          <p:cNvSpPr>
+            <a:spLocks noGrp="1"/>
+          </p:cNvSpPr>
+          <p:nvPr>
+            <p:ph type="dt" idx="1"/>
+          </p:nvPr>
+        </p:nvSpPr>
+        <p:spPr>
+          <a:xfrm>
+            <a:off x="3884613" y="0"/>
+            <a:ext cx="2971800" cy="457200"/>
+          </a:xfrm>
+          <a:prstGeom prst="rect">
+            <a:avLst/>
+          </a:prstGeom>
+        </p:spPr>
+        <p:txBody>
+          <a:bodyPr vert="horz" lIns="91440" tIns="45720" rIns="91440" bIns="45720" rtlCol="0"/>
+          <a:lstStyle>
+            <a:lvl1pPr algn="r">
+              <a:defRPr sz="1200"/>
+            </a:lvl1pPr>
+          </a:lstStyle>
+          <a:p>
+            <a:fld id="{0F89C1C7-3DCD-1040-A9CF-14679D8B5DDD}" type="datetimeFigureOut">
+              <a:rPr lang="en-US" smtClean="0"/>
+              <a:t>10/17/16</a:t>
+            </a:fld>
+            <a:endParaRPr lang="en-US"/>
+          </a:p>
+        </p:txBody>
+      </p:sp>
+      <p:sp>
+        <p:nvSpPr>
+          <p:cNvPr id="4" name="Slide Image Placeholder 3"/>
+          <p:cNvSpPr>
+            <a:spLocks noGrp="1" noRot="1" noChangeAspect="1"/>
+          </p:cNvSpPr>
+          <p:nvPr>
+            <p:ph type="sldImg" idx="2"/>
+          </p:nvPr>
+        </p:nvSpPr>
+        <p:spPr>
+          <a:xfrm>
+            <a:off x="1143000" y="685800"/>
+            <a:ext cx="4572000" cy="3429000"/>
+          </a:xfrm>
+          <a:prstGeom prst="rect">
+            <a:avLst/>
+          </a:prstGeom>
+          <a:noFill/>
+          <a:ln w="12700">
+            <a:solidFill>
+              <a:prstClr val="black"/>
+            </a:solidFill>
+          </a:ln>
+        </p:spPr>
+        <p:txBody>
+          <a:bodyPr vert="horz" lIns="91440" tIns="45720" rIns="91440" bIns="45720" rtlCol="0" anchor="ctr"/>
+          <a:lstStyle/>
+          <a:p>
+            <a:endParaRPr lang="en-US"/>
+          </a:p>
+        </p:txBody>
+      </p:sp>
+      <p:sp>
+        <p:nvSpPr>
+          <p:cNvPr id="5" name="Notes Placeholder 4"/>
+          <p:cNvSpPr>
+            <a:spLocks noGrp="1"/>
+          </p:cNvSpPr>
+          <p:nvPr>
+            <p:ph type="body" sz="quarter" idx="3"/>
+          </p:nvPr>
+        </p:nvSpPr>
+        <p:spPr>
+          <a:xfrm>
+            <a:off x="685800" y="4343400"/>
+            <a:ext cx="5486400" cy="4114800"/>
+          </a:xfrm>
+          <a:prstGeom prst="rect">
+            <a:avLst/>
+          </a:prstGeom>
+        </p:spPr>
+        <p:txBody>
+          <a:bodyPr vert="horz" lIns="91440" tIns="45720" rIns="91440" bIns="45720" rtlCol="0"/>
+          <a:lstStyle/>
+          <a:p>
+            <a:pPr lvl="0"/>
+            <a:r>
+              <a:rPr lang="en-US" smtClean="0"/>
+              <a:t>Click to edit Master text styles</a:t>
+            </a:r>
+          </a:p>
+          <a:p>
+            <a:pPr lvl="1"/>
+            <a:r>
+              <a:rPr lang="en-US" smtClean="0"/>
+              <a:t>Second level</a:t>
+            </a:r>
+          </a:p>
+          <a:p>
+            <a:pPr lvl="2"/>
+            <a:r>
+              <a:rPr lang="en-US" smtClean="0"/>
+              <a:t>Third level</a:t>
+            </a:r>
+          </a:p>
+          <a:p>
+            <a:pPr lvl="3"/>
+            <a:r>
+              <a:rPr lang="en-US" smtClean="0"/>
+              <a:t>Fourth level</a:t>
+            </a:r>
+          </a:p>
+          <a:p>
+            <a:pPr lvl="4"/>
+            <a:r>
+              <a:rPr lang="en-US" smtClean="0"/>
+              <a:t>Fifth level</a:t>
+            </a:r>
+            <a:endParaRPr lang="en-US"/>
+          </a:p>
+        </p:txBody>
+      </p:sp>
+      <p:sp>
+        <p:nvSpPr>
+          <p:cNvPr id="6" name="Footer Placeholder 5"/>
+          <p:cNvSpPr>
+            <a:spLocks noGrp="1"/>
+          </p:cNvSpPr>
+          <p:nvPr>
+            <p:ph type="ftr" sz="quarter" idx="4"/>
+          </p:nvPr>
+        </p:nvSpPr>
+        <p:spPr>
+          <a:xfrm>
+            <a:off x="0" y="8685213"/>
+            <a:ext cx="2971800" cy="457200"/>
+          </a:xfrm>
+          <a:prstGeom prst="rect">
+            <a:avLst/>
+          </a:prstGeom>
+        </p:spPr>
+        <p:txBody>
+          <a:bodyPr vert="horz" lIns="91440" tIns="45720" rIns="91440" bIns="45720" rtlCol="0" anchor="b"/>
+          <a:lstStyle>
+            <a:lvl1pPr algn="l">
+              <a:defRPr sz="1200"/>
+            </a:lvl1pPr>
+          </a:lstStyle>
+          <a:p>
+            <a:endParaRPr lang="en-US"/>
+          </a:p>
+        </p:txBody>
+      </p:sp>
+      <p:sp>
+        <p:nvSpPr>
+          <p:cNvPr id="7" name="Slide Number Placeholder 6"/>
+          <p:cNvSpPr>
+            <a:spLocks noGrp="1"/>
+          </p:cNvSpPr>
+          <p:nvPr>
+            <p:ph type="sldNum" sz="quarter" idx="5"/>
+          </p:nvPr>
+        </p:nvSpPr>
+        <p:spPr>
+          <a:xfrm>
+            <a:off x="3884613" y="8685213"/>
+            <a:ext cx="2971800" cy="457200"/>
+          </a:xfrm>
+          <a:prstGeom prst="rect">
+            <a:avLst/>
+          </a:prstGeom>
+        </p:spPr>
+        <p:txBody>
+          <a:bodyPr vert="horz" lIns="91440" tIns="45720" rIns="91440" bIns="45720" rtlCol="0" anchor="b"/>
+          <a:lstStyle>
+            <a:lvl1pPr algn="r">
+              <a:defRPr sz="1200"/>
+            </a:lvl1pPr>
+          </a:lstStyle>
+          <a:p>
+            <a:fld id="{BB5E49A5-4136-284D-997B-48E1D791AD67}" type="slidenum">
+              <a:rPr lang="en-US" smtClean="0"/>
+              <a:t>‹#›</a:t>
+            </a:fld>
+            <a:endParaRPr lang="en-US"/>
+          </a:p>
+        </p:txBody>
+      </p:sp>
+    </p:spTree>
+    <p:extLst>
+      <p:ext uri="{BB962C8B-B14F-4D97-AF65-F5344CB8AC3E}">
+        <p14:creationId xmlns:p14="http://schemas.microsoft.com/office/powerpoint/2010/main" val="2623252185"/>
+      </p:ext>
+    </p:extLst>
+  </p:cSld>
+  <p:clrMap bg1="lt1" tx1="dk1" bg2="lt2" tx2="dk2" accent1="accent1" accent2="accent2" accent3="accent3" accent4="accent4" accent5="accent5" accent6="accent6" hlink="hlink" folHlink="folHlink"/>
+  <p:notesStyle>
+    <a:lvl1pPr marL="0" algn="l" defTabSz="457200" rtl="0" eaLnBrk="1" latinLnBrk="0" hangingPunct="1">
+      <a:defRPr sz="1200" kern="1200">
+        <a:solidFill>
+          <a:schemeClr val="tx1"/>
+        </a:solidFill>
+        <a:latin typeface="+mn-lt"/>
+        <a:ea typeface="+mn-ea"/>
+        <a:cs typeface="+mn-cs"/>
+      </a:defRPr>
+    </a:lvl1pPr>
+    <a:lvl2pPr marL="457200" algn="l" defTabSz="457200" rtl="0" eaLnBrk="1" latinLnBrk="0" hangingPunct="1">
+      <a:defRPr sz="1200" kern="1200">
+        <a:solidFill>
+          <a:schemeClr val="tx1"/>
+        </a:solidFill>
+        <a:latin typeface="+mn-lt"/>
+        <a:ea typeface="+mn-ea"/>
+        <a:cs typeface="+mn-cs"/>
+      </a:defRPr>
+    </a:lvl2pPr>
+    <a:lvl3pPr marL="914400" algn="l" defTabSz="457200" rtl="0" eaLnBrk="1" latinLnBrk="0" hangingPunct="1">
+      <a:defRPr sz="1200" kern="1200">
+        <a:solidFill>
+          <a:schemeClr val="tx1"/>
+        </a:solidFill>
+        <a:latin typeface="+mn-lt"/>
+        <a:ea typeface="+mn-ea"/>
+        <a:cs typeface="+mn-cs"/>
+      </a:defRPr>
+    </a:lvl3pPr>
+    <a:lvl4pPr marL="1371600" algn="l" defTabSz="457200" rtl="0" eaLnBrk="1" latinLnBrk="0" hangingPunct="1">
+      <a:defRPr sz="1200" kern="1200">
+        <a:solidFill>
+          <a:schemeClr val="tx1"/>
+        </a:solidFill>
+        <a:latin typeface="+mn-lt"/>
+        <a:ea typeface="+mn-ea"/>
+        <a:cs typeface="+mn-cs"/>
+      </a:defRPr>
+    </a:lvl4pPr>
+    <a:lvl5pPr marL="1828800" algn="l" defTabSz="457200" rtl="0" eaLnBrk="1" latinLnBrk="0" hangingPunct="1">
+      <a:defRPr sz="1200" kern="1200">
+        <a:solidFill>
+          <a:schemeClr val="tx1"/>
+        </a:solidFill>
+        <a:latin typeface="+mn-lt"/>
+        <a:ea typeface="+mn-ea"/>
+        <a:cs typeface="+mn-cs"/>
+      </a:defRPr>
+    </a:lvl5pPr>
+    <a:lvl6pPr marL="2286000" algn="l" defTabSz="457200" rtl="0" eaLnBrk="1" latinLnBrk="0" hangingPunct="1">
+      <a:defRPr sz="1200" kern="1200">
+        <a:solidFill>
+          <a:schemeClr val="tx1"/>
+        </a:solidFill>
+        <a:latin typeface="+mn-lt"/>
+        <a:ea typeface="+mn-ea"/>
+        <a:cs typeface="+mn-cs"/>
+      </a:defRPr>
+    </a:lvl6pPr>
+    <a:lvl7pPr marL="2743200" algn="l" defTabSz="457200" rtl="0" eaLnBrk="1" latinLnBrk="0" hangingPunct="1">
+      <a:defRPr sz="1200" kern="1200">
+        <a:solidFill>
+          <a:schemeClr val="tx1"/>
+        </a:solidFill>
+        <a:latin typeface="+mn-lt"/>
+        <a:ea typeface="+mn-ea"/>
+        <a:cs typeface="+mn-cs"/>
+      </a:defRPr>
+    </a:lvl7pPr>
+    <a:lvl8pPr marL="3200400" algn="l" defTabSz="457200" rtl="0" eaLnBrk="1" latinLnBrk="0" hangingPunct="1">
+      <a:defRPr sz="1200" kern="1200">
+        <a:solidFill>
+          <a:schemeClr val="tx1"/>
+        </a:solidFill>
+        <a:latin typeface="+mn-lt"/>
+        <a:ea typeface="+mn-ea"/>
+        <a:cs typeface="+mn-cs"/>
+      </a:defRPr>
+    </a:lvl8pPr>
+    <a:lvl9pPr marL="3657600" algn="l" defTabSz="457200" rtl="0" eaLnBrk="1" latinLnBrk="0" hangingPunct="1">
+      <a:defRPr sz="1200" kern="1200">
+        <a:solidFill>
+          <a:schemeClr val="tx1"/>
+        </a:solidFill>
+        <a:latin typeface="+mn-lt"/>
+        <a:ea typeface="+mn-ea"/>
+        <a:cs typeface="+mn-cs"/>
+      </a:defRPr>
+    </a:lvl9pPr>
+  </p:notesStyle>
+</p:notesMaster>
+</file>
+
+<file path=ppt/notesSlides/notesSlide1.xml><?xml version="1.0" encoding="utf-8"?>
+<p:notes xmlns:a="http://schemas.openxmlformats.org/drawingml/2006/main" xmlns:p="http://schemas.openxmlformats.org/presentationml/2006/main" xmlns:r="http://schemas.openxmlformats.org/officeDocument/2006/relationships">
+  <p:cSld>
+    <p:spTree>
+      <p:nvGrpSpPr>
+        <p:cNvPr id="1" name=""/>
+        <p:cNvGrpSpPr/>
+        <p:nvPr/>
+      </p:nvGrpSpPr>
+      <p:grpSpPr>
+        <a:xfrm>
+          <a:off x="0" y="0"/>
+          <a:ext cx="0" cy="0"/>
+          <a:chOff x="0" y="0"/>
+          <a:chExt cx="0" cy="0"/>
+        </a:xfrm>
+      </p:grpSpPr>
+      <p:sp>
+        <p:nvSpPr>
+          <p:cNvPr id="2" name="Slide Image Placeholder 1"/>
+          <p:cNvSpPr>
+            <a:spLocks noGrp="1"/>
+          </p:cNvSpPr>
+          <p:nvPr>
+            <p:ph type="sldImg" idx="2"/>
+          </p:nvPr>
+        </p:nvSpPr>
+        <p:spPr/>
+      </p:sp>
+      <p:sp>
+        <p:nvSpPr>
+          <p:cNvPr id="3" name="Notes Placeholder 2"/>
+          <p:cNvSpPr>
+            <a:spLocks noGrp="1"/>
+          </p:cNvSpPr>
+          <p:nvPr>
+            <p:ph type="body" idx="3" sz="quarter"/>
+          </p:nvPr>
+        </p:nvSpPr>
+        <p:spPr/>
+        <p:txBody>
+          <a:bodyPr/>
+          <a:lstStyle/>
+          <a:p>
+            <a:r>
+              <a:t>SPEAKER NOTE — COST ESTIMATES (not validated figures)</a:t>
+            </a:r>
+          </a:p>
+          <a:p/>
+          <a:p>
+            <a:r>
+              <a:t>All dollar ranges on this slide are market-rate estimates only. They have NOT been validated against actual vendor quotes, procurement data, or your organization’s labor category rates. Replace before presenting to a CFO or contracting officer.</a:t>
+            </a:r>
+          </a:p>
+          <a:p/>
+          <a:p>
+            <a:r>
+              <a:t>Infrastructure ($150K–$300K)</a:t>
+            </a:r>
+          </a:p>
+          <a:p>
+            <a:r>
+              <a:t>  Basis: AWS GovCloud or on-prem K8s at roughly $12K–$25K/month annualized for the specified spec (64 vCPU, 256 GB RAM, 10 TB NVMe) plus LLM API credits. Replace with an actual AWS GovCloud / Azure Gov quote for this exact configuration.</a:t>
+            </a:r>
+          </a:p>
+          <a:p/>
+          <a:p>
+            <a:r>
+              <a:t>Personnel ($300K–$400K)</a:t>
+            </a:r>
+          </a:p>
+          <a:p>
+            <a:r>
+              <a:t>  Basis: 4 FTEs at a blended $75K–$100K/year — assumes a mix of GS-13 equivalents and contractor labor. Replace with your actual GS salary tables or IDIQ labor category rates for the four roles listed.</a:t>
+            </a:r>
+          </a:p>
+          <a:p/>
+          <a:p>
+            <a:r>
+              <a:t>Academy + GameDay ($120K–$160K)</a:t>
+            </a:r>
+          </a:p>
+          <a:p>
+            <a:r>
+              <a:t>  Basis: ~$20K–$40K per cohort × 4 cohorts, rough facilitation and compute estimate. Adjust based on whether delivery is in-person or virtual, and whether facilitators are internal staff or contracted.</a:t>
+            </a:r>
+          </a:p>
+          <a:p/>
+          <a:p>
+            <a:r>
+              <a:t>Year-1 Return ($4M–$6M+)</a:t>
+            </a:r>
+          </a:p>
+          <a:p>
+            <a:r>
+              <a:t>  Basis: If one program compresses ATO from 15 months to 2 months, and burns $500K/month in program labor during that period, the saved 13 months = $6.5M. Replace with a real program data point from your portfolio if available. This figure will be the most scrutinized number in the room.</a:t>
+            </a:r>
+          </a:p>
+        </p:txBody>
+      </p:sp>
+      <p:sp>
+        <p:nvSpPr>
+          <p:cNvPr id="4" name="Slide Number Placeholder 3"/>
+          <p:cNvSpPr>
+            <a:spLocks noGrp="1"/>
+          </p:cNvSpPr>
+          <p:nvPr>
+            <p:ph type="sldNum" idx="5" sz="quarter"/>
+          </p:nvPr>
+        </p:nvSpPr>
+        <p:spPr/>
+      </p:sp>
+    </p:spTree>
+  </p:cSld>
+  <p:clrMapOvr>
+    <a:masterClrMapping/>
+  </p:clrMapOvr>
+</p:notes>
 </file>
 
 <file path=ppt/slideLayouts/slideLayout1.xml><?xml version="1.0" encoding="utf-8"?>
@@ -26245,4 +26715,324 @@
   </a:objectDefaults>
   <a:extraClrSchemeLst/>
 </a:theme>
+</file>
+
+<file path=ppt/theme/theme2.xml><?xml version="1.0" encoding="utf-8"?>
+<a:theme xmlns:a="http://schemas.openxmlformats.org/drawingml/2006/main" name="Office Theme">
+  <a:themeElements>
+    <a:clrScheme name="Office">
+      <a:dk1>
+        <a:sysClr val="windowText" lastClr="000000"/>
+      </a:dk1>
+      <a:lt1>
+        <a:sysClr val="window" lastClr="FFFFFF"/>
+      </a:lt1>
+      <a:dk2>
+        <a:srgbClr val="1F497D"/>
+      </a:dk2>
+      <a:lt2>
+        <a:srgbClr val="EEECE1"/>
+      </a:lt2>
+      <a:accent1>
+        <a:srgbClr val="4F81BD"/>
+      </a:accent1>
+      <a:accent2>
+        <a:srgbClr val="C0504D"/>
+      </a:accent2>
+      <a:accent3>
+        <a:srgbClr val="9BBB59"/>
+      </a:accent3>
+      <a:accent4>
+        <a:srgbClr val="8064A2"/>
+      </a:accent4>
+      <a:accent5>
+        <a:srgbClr val="4BACC6"/>
+      </a:accent5>
+      <a:accent6>
+        <a:srgbClr val="F79646"/>
+      </a:accent6>
+      <a:hlink>
+        <a:srgbClr val="0000FF"/>
+      </a:hlink>
+      <a:folHlink>
+        <a:srgbClr val="800080"/>
+      </a:folHlink>
+    </a:clrScheme>
+    <a:fontScheme name="Office">
+      <a:majorFont>
+        <a:latin typeface="Calibri"/>
+        <a:ea typeface=""/>
+        <a:cs typeface=""/>
+        <a:font script="Jpan" typeface="ＭＳ Ｐゴシック"/>
+        <a:font script="Hang" typeface="맑은 고딕"/>
+        <a:font script="Hans" typeface="宋体"/>
+        <a:font script="Hant" typeface="新細明體"/>
+        <a:font script="Arab" typeface="Times New Roman"/>
+        <a:font script="Hebr" typeface="Times New Roman"/>
+        <a:font script="Thai" typeface="Angsana New"/>
+        <a:font script="Ethi" typeface="Nyala"/>
+        <a:font script="Beng" typeface="Vrinda"/>
+        <a:font script="Gujr" typeface="Shruti"/>
+        <a:font script="Khmr" typeface="MoolBoran"/>
+        <a:font script="Knda" typeface="Tunga"/>
+        <a:font script="Guru" typeface="Raavi"/>
+        <a:font script="Cans" typeface="Euphemia"/>
+        <a:font script="Cher" typeface="Plantagenet Cherokee"/>
+        <a:font script="Yiii" typeface="Microsoft Yi Baiti"/>
+        <a:font script="Tibt" typeface="Microsoft Himalaya"/>
+        <a:font script="Thaa" typeface="MV Boli"/>
+        <a:font script="Deva" typeface="Mangal"/>
+        <a:font script="Telu" typeface="Gautami"/>
+        <a:font script="Taml" typeface="Latha"/>
+        <a:font script="Syrc" typeface="Estrangelo Edessa"/>
+        <a:font script="Orya" typeface="Kalinga"/>
+        <a:font script="Mlym" typeface="Kartika"/>
+        <a:font script="Laoo" typeface="DokChampa"/>
+        <a:font script="Sinh" typeface="Iskoola Pota"/>
+        <a:font script="Mong" typeface="Mongolian Baiti"/>
+        <a:font script="Viet" typeface="Times New Roman"/>
+        <a:font script="Uigh" typeface="Microsoft Uighur"/>
+        <a:font script="Geor" typeface="Sylfaen"/>
+      </a:majorFont>
+      <a:minorFont>
+        <a:latin typeface="Calibri"/>
+        <a:ea typeface=""/>
+        <a:cs typeface=""/>
+        <a:font script="Jpan" typeface="ＭＳ Ｐゴシック"/>
+        <a:font script="Hang" typeface="맑은 고딕"/>
+        <a:font script="Hans" typeface="宋体"/>
+        <a:font script="Hant" typeface="新細明體"/>
+        <a:font script="Arab" typeface="Arial"/>
+        <a:font script="Hebr" typeface="Arial"/>
+        <a:font script="Thai" typeface="Cordia New"/>
+        <a:font script="Ethi" typeface="Nyala"/>
+        <a:font script="Beng" typeface="Vrinda"/>
+        <a:font script="Gujr" typeface="Shruti"/>
+        <a:font script="Khmr" typeface="DaunPenh"/>
+        <a:font script="Knda" typeface="Tunga"/>
+        <a:font script="Guru" typeface="Raavi"/>
+        <a:font script="Cans" typeface="Euphemia"/>
+        <a:font script="Cher" typeface="Plantagenet Cherokee"/>
+        <a:font script="Yiii" typeface="Microsoft Yi Baiti"/>
+        <a:font script="Tibt" typeface="Microsoft Himalaya"/>
+        <a:font script="Thaa" typeface="MV Boli"/>
+        <a:font script="Deva" typeface="Mangal"/>
+        <a:font script="Telu" typeface="Gautami"/>
+        <a:font script="Taml" typeface="Latha"/>
+        <a:font script="Syrc" typeface="Estrangelo Edessa"/>
+        <a:font script="Orya" typeface="Kalinga"/>
+        <a:font script="Mlym" typeface="Kartika"/>
+        <a:font script="Laoo" typeface="DokChampa"/>
+        <a:font script="Sinh" typeface="Iskoola Pota"/>
+        <a:font script="Mong" typeface="Mongolian Baiti"/>
+        <a:font script="Viet" typeface="Arial"/>
+        <a:font script="Uigh" typeface="Microsoft Uighur"/>
+        <a:font script="Geor" typeface="Sylfaen"/>
+      </a:minorFont>
+    </a:fontScheme>
+    <a:fmtScheme name="Office">
+      <a:fillStyleLst>
+        <a:solidFill>
+          <a:schemeClr val="phClr"/>
+        </a:solidFill>
+        <a:gradFill rotWithShape="1">
+          <a:gsLst>
+            <a:gs pos="0">
+              <a:schemeClr val="phClr">
+                <a:tint val="50000"/>
+                <a:satMod val="300000"/>
+              </a:schemeClr>
+            </a:gs>
+            <a:gs pos="35000">
+              <a:schemeClr val="phClr">
+                <a:tint val="37000"/>
+                <a:satMod val="300000"/>
+              </a:schemeClr>
+            </a:gs>
+            <a:gs pos="100000">
+              <a:schemeClr val="phClr">
+                <a:tint val="15000"/>
+                <a:satMod val="350000"/>
+              </a:schemeClr>
+            </a:gs>
+          </a:gsLst>
+          <a:lin ang="16200000" scaled="1"/>
+        </a:gradFill>
+        <a:gradFill rotWithShape="1">
+          <a:gsLst>
+            <a:gs pos="0">
+              <a:schemeClr val="phClr">
+                <a:tint val="100000"/>
+                <a:shade val="100000"/>
+                <a:satMod val="130000"/>
+              </a:schemeClr>
+            </a:gs>
+            <a:gs pos="100000">
+              <a:schemeClr val="phClr">
+                <a:tint val="50000"/>
+                <a:shade val="100000"/>
+                <a:satMod val="350000"/>
+              </a:schemeClr>
+            </a:gs>
+          </a:gsLst>
+          <a:lin ang="16200000" scaled="0"/>
+        </a:gradFill>
+      </a:fillStyleLst>
+      <a:lnStyleLst>
+        <a:ln w="9525" cap="flat" cmpd="sng" algn="ctr">
+          <a:solidFill>
+            <a:schemeClr val="phClr">
+              <a:shade val="95000"/>
+              <a:satMod val="105000"/>
+            </a:schemeClr>
+          </a:solidFill>
+          <a:prstDash val="solid"/>
+        </a:ln>
+        <a:ln w="25400" cap="flat" cmpd="sng" algn="ctr">
+          <a:solidFill>
+            <a:schemeClr val="phClr"/>
+          </a:solidFill>
+          <a:prstDash val="solid"/>
+        </a:ln>
+        <a:ln w="38100" cap="flat" cmpd="sng" algn="ctr">
+          <a:solidFill>
+            <a:schemeClr val="phClr"/>
+          </a:solidFill>
+          <a:prstDash val="solid"/>
+        </a:ln>
+      </a:lnStyleLst>
+      <a:effectStyleLst>
+        <a:effectStyle>
+          <a:effectLst>
+            <a:outerShdw blurRad="40000" dist="20000" dir="5400000" rotWithShape="0">
+              <a:srgbClr val="000000">
+                <a:alpha val="38000"/>
+              </a:srgbClr>
+            </a:outerShdw>
+          </a:effectLst>
+        </a:effectStyle>
+        <a:effectStyle>
+          <a:effectLst>
+            <a:outerShdw blurRad="40000" dist="23000" dir="5400000" rotWithShape="0">
+              <a:srgbClr val="000000">
+                <a:alpha val="35000"/>
+              </a:srgbClr>
+            </a:outerShdw>
+          </a:effectLst>
+        </a:effectStyle>
+        <a:effectStyle>
+          <a:effectLst>
+            <a:outerShdw blurRad="40000" dist="23000" dir="5400000" rotWithShape="0">
+              <a:srgbClr val="000000">
+                <a:alpha val="35000"/>
+              </a:srgbClr>
+            </a:outerShdw>
+          </a:effectLst>
+          <a:scene3d>
+            <a:camera prst="orthographicFront">
+              <a:rot lat="0" lon="0" rev="0"/>
+            </a:camera>
+            <a:lightRig rig="threePt" dir="t">
+              <a:rot lat="0" lon="0" rev="1200000"/>
+            </a:lightRig>
+          </a:scene3d>
+          <a:sp3d>
+            <a:bevelT w="63500" h="25400"/>
+          </a:sp3d>
+        </a:effectStyle>
+      </a:effectStyleLst>
+      <a:bgFillStyleLst>
+        <a:solidFill>
+          <a:schemeClr val="phClr"/>
+        </a:solidFill>
+        <a:gradFill rotWithShape="1">
+          <a:gsLst>
+            <a:gs pos="0">
+              <a:schemeClr val="phClr">
+                <a:tint val="40000"/>
+                <a:satMod val="350000"/>
+              </a:schemeClr>
+            </a:gs>
+            <a:gs pos="40000">
+              <a:schemeClr val="phClr">
+                <a:tint val="45000"/>
+                <a:shade val="99000"/>
+                <a:satMod val="350000"/>
+              </a:schemeClr>
+            </a:gs>
+            <a:gs pos="100000">
+              <a:schemeClr val="phClr">
+                <a:shade val="20000"/>
+                <a:satMod val="255000"/>
+              </a:schemeClr>
+            </a:gs>
+          </a:gsLst>
+          <a:path path="circle">
+            <a:fillToRect l="50000" t="-80000" r="50000" b="180000"/>
+          </a:path>
+        </a:gradFill>
+        <a:gradFill rotWithShape="1">
+          <a:gsLst>
+            <a:gs pos="0">
+              <a:schemeClr val="phClr">
+                <a:tint val="80000"/>
+                <a:satMod val="300000"/>
+              </a:schemeClr>
+            </a:gs>
+            <a:gs pos="100000">
+              <a:schemeClr val="phClr">
+                <a:shade val="30000"/>
+                <a:satMod val="200000"/>
+              </a:schemeClr>
+            </a:gs>
+          </a:gsLst>
+          <a:path path="circle">
+            <a:fillToRect l="50000" t="50000" r="50000" b="50000"/>
+          </a:path>
+        </a:gradFill>
+      </a:bgFillStyleLst>
+    </a:fmtScheme>
+  </a:themeElements>
+  <a:objectDefaults>
+    <a:spDef>
+      <a:spPr/>
+      <a:bodyPr/>
+      <a:lstStyle/>
+      <a:style>
+        <a:lnRef idx="1">
+          <a:schemeClr val="accent1"/>
+        </a:lnRef>
+        <a:fillRef idx="3">
+          <a:schemeClr val="accent1"/>
+        </a:fillRef>
+        <a:effectRef idx="2">
+          <a:schemeClr val="accent1"/>
+        </a:effectRef>
+        <a:fontRef idx="minor">
+          <a:schemeClr val="lt1"/>
+        </a:fontRef>
+      </a:style>
+    </a:spDef>
+    <a:lnDef>
+      <a:spPr/>
+      <a:bodyPr/>
+      <a:lstStyle/>
+      <a:style>
+        <a:lnRef idx="2">
+          <a:schemeClr val="accent1"/>
+        </a:lnRef>
+        <a:fillRef idx="0">
+          <a:schemeClr val="accent1"/>
+        </a:fillRef>
+        <a:effectRef idx="1">
+          <a:schemeClr val="accent1"/>
+        </a:effectRef>
+        <a:fontRef idx="minor">
+          <a:schemeClr val="tx1"/>
+        </a:fontRef>
+      </a:style>
+    </a:lnDef>
+  </a:objectDefaults>
+  <a:extraClrSchemeLst/>
+</a:theme>
 </file>